--- a/MongoDB.pptx
+++ b/MongoDB.pptx
@@ -117,6 +117,11 @@
       </a:defRPr>
     </a:lvl9pPr>
   </p:defaultTextStyle>
+  <p:extLst>
+    <p:ext uri="{EFAFB233-063F-42B5-8137-9DF3F51BA10A}">
+      <p15:sldGuideLst xmlns:p15="http://schemas.microsoft.com/office/powerpoint/2012/main"/>
+    </p:ext>
+  </p:extLst>
 </p:presentation>
 </file>
 
@@ -269,7 +274,7 @@
           <a:p>
             <a:fld id="{B66E714E-885D-4D12-977C-C047A2AC8E1D}" type="datetimeFigureOut">
               <a:rPr lang="en-IN" smtClean="0"/>
-              <a:t>16-10-2023</a:t>
+              <a:t>20-11-2023</a:t>
             </a:fld>
             <a:endParaRPr lang="en-IN"/>
           </a:p>
@@ -469,7 +474,7 @@
           <a:p>
             <a:fld id="{B66E714E-885D-4D12-977C-C047A2AC8E1D}" type="datetimeFigureOut">
               <a:rPr lang="en-IN" smtClean="0"/>
-              <a:t>16-10-2023</a:t>
+              <a:t>20-11-2023</a:t>
             </a:fld>
             <a:endParaRPr lang="en-IN"/>
           </a:p>
@@ -679,7 +684,7 @@
           <a:p>
             <a:fld id="{B66E714E-885D-4D12-977C-C047A2AC8E1D}" type="datetimeFigureOut">
               <a:rPr lang="en-IN" smtClean="0"/>
-              <a:t>16-10-2023</a:t>
+              <a:t>20-11-2023</a:t>
             </a:fld>
             <a:endParaRPr lang="en-IN"/>
           </a:p>
@@ -960,7 +965,7 @@
           <a:p>
             <a:fld id="{B66E714E-885D-4D12-977C-C047A2AC8E1D}" type="datetimeFigureOut">
               <a:rPr lang="en-IN" smtClean="0"/>
-              <a:t>16-10-2023</a:t>
+              <a:t>20-11-2023</a:t>
             </a:fld>
             <a:endParaRPr lang="en-IN"/>
           </a:p>
@@ -1236,7 +1241,7 @@
           <a:p>
             <a:fld id="{B66E714E-885D-4D12-977C-C047A2AC8E1D}" type="datetimeFigureOut">
               <a:rPr lang="en-IN" smtClean="0"/>
-              <a:t>16-10-2023</a:t>
+              <a:t>20-11-2023</a:t>
             </a:fld>
             <a:endParaRPr lang="en-IN"/>
           </a:p>
@@ -1504,7 +1509,7 @@
           <a:p>
             <a:fld id="{B66E714E-885D-4D12-977C-C047A2AC8E1D}" type="datetimeFigureOut">
               <a:rPr lang="en-IN" smtClean="0"/>
-              <a:t>16-10-2023</a:t>
+              <a:t>20-11-2023</a:t>
             </a:fld>
             <a:endParaRPr lang="en-IN"/>
           </a:p>
@@ -1919,7 +1924,7 @@
           <a:p>
             <a:fld id="{B66E714E-885D-4D12-977C-C047A2AC8E1D}" type="datetimeFigureOut">
               <a:rPr lang="en-IN" smtClean="0"/>
-              <a:t>16-10-2023</a:t>
+              <a:t>20-11-2023</a:t>
             </a:fld>
             <a:endParaRPr lang="en-IN"/>
           </a:p>
@@ -2061,7 +2066,7 @@
           <a:p>
             <a:fld id="{B66E714E-885D-4D12-977C-C047A2AC8E1D}" type="datetimeFigureOut">
               <a:rPr lang="en-IN" smtClean="0"/>
-              <a:t>16-10-2023</a:t>
+              <a:t>20-11-2023</a:t>
             </a:fld>
             <a:endParaRPr lang="en-IN"/>
           </a:p>
@@ -2174,7 +2179,7 @@
           <a:p>
             <a:fld id="{B66E714E-885D-4D12-977C-C047A2AC8E1D}" type="datetimeFigureOut">
               <a:rPr lang="en-IN" smtClean="0"/>
-              <a:t>16-10-2023</a:t>
+              <a:t>20-11-2023</a:t>
             </a:fld>
             <a:endParaRPr lang="en-IN"/>
           </a:p>
@@ -2487,7 +2492,7 @@
           <a:p>
             <a:fld id="{B66E714E-885D-4D12-977C-C047A2AC8E1D}" type="datetimeFigureOut">
               <a:rPr lang="en-IN" smtClean="0"/>
-              <a:t>16-10-2023</a:t>
+              <a:t>20-11-2023</a:t>
             </a:fld>
             <a:endParaRPr lang="en-IN"/>
           </a:p>
@@ -2776,7 +2781,7 @@
           <a:p>
             <a:fld id="{B66E714E-885D-4D12-977C-C047A2AC8E1D}" type="datetimeFigureOut">
               <a:rPr lang="en-IN" smtClean="0"/>
-              <a:t>16-10-2023</a:t>
+              <a:t>20-11-2023</a:t>
             </a:fld>
             <a:endParaRPr lang="en-IN"/>
           </a:p>
@@ -3019,7 +3024,7 @@
           <a:p>
             <a:fld id="{B66E714E-885D-4D12-977C-C047A2AC8E1D}" type="datetimeFigureOut">
               <a:rPr lang="en-IN" smtClean="0"/>
-              <a:t>16-10-2023</a:t>
+              <a:t>20-11-2023</a:t>
             </a:fld>
             <a:endParaRPr lang="en-IN"/>
           </a:p>
@@ -13455,8 +13460,17 @@
             </a:pPr>
             <a:r>
               <a:rPr lang="hu-HU" dirty="0"/>
-              <a:t>Document-Oriented storege</a:t>
-            </a:r>
+              <a:t>Document-Oriented stor</a:t>
+            </a:r>
+            <a:r>
+              <a:rPr lang="en-IN"/>
+              <a:t>a</a:t>
+            </a:r>
+            <a:r>
+              <a:rPr lang="hu-HU"/>
+              <a:t>ge</a:t>
+            </a:r>
+            <a:endParaRPr lang="hu-HU" dirty="0"/>
           </a:p>
           <a:p>
             <a:pPr>

--- a/MongoDB.pptx
+++ b/MongoDB.pptx
@@ -274,7 +274,7 @@
           <a:p>
             <a:fld id="{B66E714E-885D-4D12-977C-C047A2AC8E1D}" type="datetimeFigureOut">
               <a:rPr lang="en-IN" smtClean="0"/>
-              <a:t>20-11-2023</a:t>
+              <a:t>27-01-2025</a:t>
             </a:fld>
             <a:endParaRPr lang="en-IN"/>
           </a:p>
@@ -474,7 +474,7 @@
           <a:p>
             <a:fld id="{B66E714E-885D-4D12-977C-C047A2AC8E1D}" type="datetimeFigureOut">
               <a:rPr lang="en-IN" smtClean="0"/>
-              <a:t>20-11-2023</a:t>
+              <a:t>27-01-2025</a:t>
             </a:fld>
             <a:endParaRPr lang="en-IN"/>
           </a:p>
@@ -684,7 +684,7 @@
           <a:p>
             <a:fld id="{B66E714E-885D-4D12-977C-C047A2AC8E1D}" type="datetimeFigureOut">
               <a:rPr lang="en-IN" smtClean="0"/>
-              <a:t>20-11-2023</a:t>
+              <a:t>27-01-2025</a:t>
             </a:fld>
             <a:endParaRPr lang="en-IN"/>
           </a:p>
@@ -965,7 +965,7 @@
           <a:p>
             <a:fld id="{B66E714E-885D-4D12-977C-C047A2AC8E1D}" type="datetimeFigureOut">
               <a:rPr lang="en-IN" smtClean="0"/>
-              <a:t>20-11-2023</a:t>
+              <a:t>27-01-2025</a:t>
             </a:fld>
             <a:endParaRPr lang="en-IN"/>
           </a:p>
@@ -1241,7 +1241,7 @@
           <a:p>
             <a:fld id="{B66E714E-885D-4D12-977C-C047A2AC8E1D}" type="datetimeFigureOut">
               <a:rPr lang="en-IN" smtClean="0"/>
-              <a:t>20-11-2023</a:t>
+              <a:t>27-01-2025</a:t>
             </a:fld>
             <a:endParaRPr lang="en-IN"/>
           </a:p>
@@ -1509,7 +1509,7 @@
           <a:p>
             <a:fld id="{B66E714E-885D-4D12-977C-C047A2AC8E1D}" type="datetimeFigureOut">
               <a:rPr lang="en-IN" smtClean="0"/>
-              <a:t>20-11-2023</a:t>
+              <a:t>27-01-2025</a:t>
             </a:fld>
             <a:endParaRPr lang="en-IN"/>
           </a:p>
@@ -1924,7 +1924,7 @@
           <a:p>
             <a:fld id="{B66E714E-885D-4D12-977C-C047A2AC8E1D}" type="datetimeFigureOut">
               <a:rPr lang="en-IN" smtClean="0"/>
-              <a:t>20-11-2023</a:t>
+              <a:t>27-01-2025</a:t>
             </a:fld>
             <a:endParaRPr lang="en-IN"/>
           </a:p>
@@ -2066,7 +2066,7 @@
           <a:p>
             <a:fld id="{B66E714E-885D-4D12-977C-C047A2AC8E1D}" type="datetimeFigureOut">
               <a:rPr lang="en-IN" smtClean="0"/>
-              <a:t>20-11-2023</a:t>
+              <a:t>27-01-2025</a:t>
             </a:fld>
             <a:endParaRPr lang="en-IN"/>
           </a:p>
@@ -2179,7 +2179,7 @@
           <a:p>
             <a:fld id="{B66E714E-885D-4D12-977C-C047A2AC8E1D}" type="datetimeFigureOut">
               <a:rPr lang="en-IN" smtClean="0"/>
-              <a:t>20-11-2023</a:t>
+              <a:t>27-01-2025</a:t>
             </a:fld>
             <a:endParaRPr lang="en-IN"/>
           </a:p>
@@ -2492,7 +2492,7 @@
           <a:p>
             <a:fld id="{B66E714E-885D-4D12-977C-C047A2AC8E1D}" type="datetimeFigureOut">
               <a:rPr lang="en-IN" smtClean="0"/>
-              <a:t>20-11-2023</a:t>
+              <a:t>27-01-2025</a:t>
             </a:fld>
             <a:endParaRPr lang="en-IN"/>
           </a:p>
@@ -2781,7 +2781,7 @@
           <a:p>
             <a:fld id="{B66E714E-885D-4D12-977C-C047A2AC8E1D}" type="datetimeFigureOut">
               <a:rPr lang="en-IN" smtClean="0"/>
-              <a:t>20-11-2023</a:t>
+              <a:t>27-01-2025</a:t>
             </a:fld>
             <a:endParaRPr lang="en-IN"/>
           </a:p>
@@ -3024,7 +3024,7 @@
           <a:p>
             <a:fld id="{B66E714E-885D-4D12-977C-C047A2AC8E1D}" type="datetimeFigureOut">
               <a:rPr lang="en-IN" smtClean="0"/>
-              <a:t>20-11-2023</a:t>
+              <a:t>27-01-2025</a:t>
             </a:fld>
             <a:endParaRPr lang="en-IN"/>
           </a:p>
@@ -13742,7 +13742,7 @@
         <p:spPr>
           <a:xfrm>
             <a:off x="647487" y="1315348"/>
-            <a:ext cx="4425255" cy="4893647"/>
+            <a:ext cx="4425255" cy="4659417"/>
           </a:xfrm>
           <a:prstGeom prst="rect">
             <a:avLst/>
@@ -13769,106 +13769,106 @@
           </a:p>
           <a:p>
             <a:pPr algn="l">
+              <a:lnSpc>
+                <a:spcPts val="2400"/>
+              </a:lnSpc>
+              <a:spcAft>
+                <a:spcPts val="1290"/>
+              </a:spcAft>
               <a:buFont typeface="Arial" panose="020B0604020202020204" pitchFamily="34" charset="0"/>
               <a:buChar char="•"/>
             </a:pPr>
             <a:r>
               <a:rPr lang="en-US" sz="2400" b="1" i="0" dirty="0">
-                <a:solidFill>
-                  <a:srgbClr val="090B0B"/>
-                </a:solidFill>
                 <a:effectLst/>
-                <a:latin typeface="Inter"/>
+                <a:latin typeface="__Source_Sans_3_a605e5"/>
               </a:rPr>
               <a:t>Atomicity</a:t>
             </a:r>
             <a:r>
               <a:rPr lang="en-US" sz="2400" b="0" i="0" dirty="0">
-                <a:solidFill>
-                  <a:srgbClr val="090B0B"/>
-                </a:solidFill>
                 <a:effectLst/>
-                <a:latin typeface="Inter"/>
+                <a:latin typeface="__Source_Sans_3_a605e5"/>
               </a:rPr>
-              <a:t> - Transactions are treated as a single unit - so if one action fails, the whole transaction fails.</a:t>
+              <a:t>: Ensures that a transaction is either fully completed or not executed at all.</a:t>
             </a:r>
           </a:p>
           <a:p>
             <a:pPr algn="l">
+              <a:lnSpc>
+                <a:spcPts val="2400"/>
+              </a:lnSpc>
+              <a:spcAft>
+                <a:spcPts val="1290"/>
+              </a:spcAft>
               <a:buFont typeface="Arial" panose="020B0604020202020204" pitchFamily="34" charset="0"/>
               <a:buChar char="•"/>
             </a:pPr>
             <a:r>
               <a:rPr lang="en-US" sz="2400" b="1" i="0" dirty="0">
-                <a:solidFill>
-                  <a:srgbClr val="090B0B"/>
-                </a:solidFill>
                 <a:effectLst/>
-                <a:latin typeface="Inter"/>
+                <a:latin typeface="__Source_Sans_3_a605e5"/>
               </a:rPr>
               <a:t>Consistency</a:t>
             </a:r>
             <a:r>
               <a:rPr lang="en-US" sz="2400" b="0" i="0" dirty="0">
-                <a:solidFill>
-                  <a:srgbClr val="090B0B"/>
-                </a:solidFill>
                 <a:effectLst/>
-                <a:latin typeface="Inter"/>
+                <a:latin typeface="__Source_Sans_3_a605e5"/>
               </a:rPr>
-              <a:t> - The database must remain in a consistent state for a transaction to succeed.</a:t>
+              <a:t>: Guarantees that a transaction brings the database from one valid state to another.</a:t>
             </a:r>
           </a:p>
           <a:p>
             <a:pPr algn="l">
+              <a:lnSpc>
+                <a:spcPts val="2400"/>
+              </a:lnSpc>
+              <a:spcAft>
+                <a:spcPts val="1290"/>
+              </a:spcAft>
               <a:buFont typeface="Arial" panose="020B0604020202020204" pitchFamily="34" charset="0"/>
               <a:buChar char="•"/>
             </a:pPr>
             <a:r>
               <a:rPr lang="en-US" sz="2400" b="1" i="0" dirty="0">
-                <a:solidFill>
-                  <a:srgbClr val="090B0B"/>
-                </a:solidFill>
                 <a:effectLst/>
-                <a:latin typeface="Inter"/>
+                <a:latin typeface="__Source_Sans_3_a605e5"/>
               </a:rPr>
               <a:t>Isolation</a:t>
             </a:r>
             <a:r>
               <a:rPr lang="en-US" sz="2400" b="0" i="0" dirty="0">
-                <a:solidFill>
-                  <a:srgbClr val="090B0B"/>
-                </a:solidFill>
                 <a:effectLst/>
-                <a:latin typeface="Inter"/>
+                <a:latin typeface="__Source_Sans_3_a605e5"/>
               </a:rPr>
-              <a:t> - Simultaneous transactions do not affect the outcome of one another.</a:t>
+              <a:t>: Ensures that concurrent transactions do not interfere with each other.</a:t>
             </a:r>
           </a:p>
           <a:p>
             <a:pPr algn="l">
+              <a:lnSpc>
+                <a:spcPts val="2400"/>
+              </a:lnSpc>
+              <a:spcAft>
+                <a:spcPts val="1290"/>
+              </a:spcAft>
               <a:buFont typeface="Arial" panose="020B0604020202020204" pitchFamily="34" charset="0"/>
               <a:buChar char="•"/>
             </a:pPr>
             <a:r>
-              <a:rPr lang="en-US" sz="2400" b="1" i="0" dirty="0">
-                <a:solidFill>
-                  <a:srgbClr val="090B0B"/>
-                </a:solidFill>
+              <a:rPr lang="en-US" sz="2400" b="1" i="0">
                 <a:effectLst/>
-                <a:latin typeface="Inter"/>
+                <a:latin typeface="__Source_Sans_3_a605e5"/>
               </a:rPr>
               <a:t>Durability</a:t>
             </a:r>
             <a:r>
-              <a:rPr lang="en-US" sz="2400" b="0" i="0" dirty="0">
-                <a:solidFill>
-                  <a:srgbClr val="090B0B"/>
-                </a:solidFill>
+              <a:rPr lang="en-US" sz="2400" b="0" i="0">
                 <a:effectLst/>
-                <a:latin typeface="Inter"/>
+                <a:latin typeface="__Source_Sans_3_a605e5"/>
               </a:rPr>
-              <a:t> - Successful changes will be stored permanently.</a:t>
+              <a:t>: Once a transaction is committed, it remains so, even in the event of a system failure.</a:t>
             </a:r>
           </a:p>
         </p:txBody>

--- a/MongoDB.pptx
+++ b/MongoDB.pptx
@@ -11,14 +11,16 @@
     <p:sldId id="365" r:id="rId5"/>
     <p:sldId id="366" r:id="rId6"/>
     <p:sldId id="372" r:id="rId7"/>
-    <p:sldId id="367" r:id="rId8"/>
-    <p:sldId id="368" r:id="rId9"/>
-    <p:sldId id="369" r:id="rId10"/>
-    <p:sldId id="370" r:id="rId11"/>
-    <p:sldId id="371" r:id="rId12"/>
-    <p:sldId id="374" r:id="rId13"/>
-    <p:sldId id="373" r:id="rId14"/>
-    <p:sldId id="270" r:id="rId15"/>
+    <p:sldId id="376" r:id="rId8"/>
+    <p:sldId id="367" r:id="rId9"/>
+    <p:sldId id="368" r:id="rId10"/>
+    <p:sldId id="369" r:id="rId11"/>
+    <p:sldId id="370" r:id="rId12"/>
+    <p:sldId id="371" r:id="rId13"/>
+    <p:sldId id="375" r:id="rId14"/>
+    <p:sldId id="374" r:id="rId15"/>
+    <p:sldId id="373" r:id="rId16"/>
+    <p:sldId id="270" r:id="rId17"/>
   </p:sldIdLst>
   <p:sldSz cx="12192000" cy="6858000"/>
   <p:notesSz cx="6858000" cy="9144000"/>
@@ -274,7 +276,7 @@
           <a:p>
             <a:fld id="{B66E714E-885D-4D12-977C-C047A2AC8E1D}" type="datetimeFigureOut">
               <a:rPr lang="en-IN" smtClean="0"/>
-              <a:t>27-01-2025</a:t>
+              <a:t>29-03-2025</a:t>
             </a:fld>
             <a:endParaRPr lang="en-IN"/>
           </a:p>
@@ -474,7 +476,7 @@
           <a:p>
             <a:fld id="{B66E714E-885D-4D12-977C-C047A2AC8E1D}" type="datetimeFigureOut">
               <a:rPr lang="en-IN" smtClean="0"/>
-              <a:t>27-01-2025</a:t>
+              <a:t>29-03-2025</a:t>
             </a:fld>
             <a:endParaRPr lang="en-IN"/>
           </a:p>
@@ -684,7 +686,7 @@
           <a:p>
             <a:fld id="{B66E714E-885D-4D12-977C-C047A2AC8E1D}" type="datetimeFigureOut">
               <a:rPr lang="en-IN" smtClean="0"/>
-              <a:t>27-01-2025</a:t>
+              <a:t>29-03-2025</a:t>
             </a:fld>
             <a:endParaRPr lang="en-IN"/>
           </a:p>
@@ -965,7 +967,7 @@
           <a:p>
             <a:fld id="{B66E714E-885D-4D12-977C-C047A2AC8E1D}" type="datetimeFigureOut">
               <a:rPr lang="en-IN" smtClean="0"/>
-              <a:t>27-01-2025</a:t>
+              <a:t>29-03-2025</a:t>
             </a:fld>
             <a:endParaRPr lang="en-IN"/>
           </a:p>
@@ -1241,7 +1243,7 @@
           <a:p>
             <a:fld id="{B66E714E-885D-4D12-977C-C047A2AC8E1D}" type="datetimeFigureOut">
               <a:rPr lang="en-IN" smtClean="0"/>
-              <a:t>27-01-2025</a:t>
+              <a:t>29-03-2025</a:t>
             </a:fld>
             <a:endParaRPr lang="en-IN"/>
           </a:p>
@@ -1509,7 +1511,7 @@
           <a:p>
             <a:fld id="{B66E714E-885D-4D12-977C-C047A2AC8E1D}" type="datetimeFigureOut">
               <a:rPr lang="en-IN" smtClean="0"/>
-              <a:t>27-01-2025</a:t>
+              <a:t>29-03-2025</a:t>
             </a:fld>
             <a:endParaRPr lang="en-IN"/>
           </a:p>
@@ -1924,7 +1926,7 @@
           <a:p>
             <a:fld id="{B66E714E-885D-4D12-977C-C047A2AC8E1D}" type="datetimeFigureOut">
               <a:rPr lang="en-IN" smtClean="0"/>
-              <a:t>27-01-2025</a:t>
+              <a:t>29-03-2025</a:t>
             </a:fld>
             <a:endParaRPr lang="en-IN"/>
           </a:p>
@@ -2066,7 +2068,7 @@
           <a:p>
             <a:fld id="{B66E714E-885D-4D12-977C-C047A2AC8E1D}" type="datetimeFigureOut">
               <a:rPr lang="en-IN" smtClean="0"/>
-              <a:t>27-01-2025</a:t>
+              <a:t>29-03-2025</a:t>
             </a:fld>
             <a:endParaRPr lang="en-IN"/>
           </a:p>
@@ -2179,7 +2181,7 @@
           <a:p>
             <a:fld id="{B66E714E-885D-4D12-977C-C047A2AC8E1D}" type="datetimeFigureOut">
               <a:rPr lang="en-IN" smtClean="0"/>
-              <a:t>27-01-2025</a:t>
+              <a:t>29-03-2025</a:t>
             </a:fld>
             <a:endParaRPr lang="en-IN"/>
           </a:p>
@@ -2492,7 +2494,7 @@
           <a:p>
             <a:fld id="{B66E714E-885D-4D12-977C-C047A2AC8E1D}" type="datetimeFigureOut">
               <a:rPr lang="en-IN" smtClean="0"/>
-              <a:t>27-01-2025</a:t>
+              <a:t>29-03-2025</a:t>
             </a:fld>
             <a:endParaRPr lang="en-IN"/>
           </a:p>
@@ -2781,7 +2783,7 @@
           <a:p>
             <a:fld id="{B66E714E-885D-4D12-977C-C047A2AC8E1D}" type="datetimeFigureOut">
               <a:rPr lang="en-IN" smtClean="0"/>
-              <a:t>27-01-2025</a:t>
+              <a:t>29-03-2025</a:t>
             </a:fld>
             <a:endParaRPr lang="en-IN"/>
           </a:p>
@@ -3024,7 +3026,7 @@
           <a:p>
             <a:fld id="{B66E714E-885D-4D12-977C-C047A2AC8E1D}" type="datetimeFigureOut">
               <a:rPr lang="en-IN" smtClean="0"/>
-              <a:t>27-01-2025</a:t>
+              <a:t>29-03-2025</a:t>
             </a:fld>
             <a:endParaRPr lang="en-IN"/>
           </a:p>
@@ -4556,8 +4558,8 @@
         </p:nvSpPr>
         <p:spPr>
           <a:xfrm>
-            <a:off x="166029" y="179379"/>
-            <a:ext cx="6248527" cy="724247"/>
+            <a:off x="309402" y="356008"/>
+            <a:ext cx="3315542" cy="724247"/>
           </a:xfrm>
         </p:spPr>
         <p:txBody>
@@ -4574,7 +4576,7 @@
                 </a:solidFill>
                 <a:latin typeface="Calibri" panose="020F0502020204030204" pitchFamily="34" charset="0"/>
               </a:rPr>
-              <a:t>Sharding Architecture </a:t>
+              <a:t>Sharding</a:t>
             </a:r>
             <a:endParaRPr lang="zh-CN" altLang="zh-CN" sz="5400" dirty="0">
               <a:solidFill>
@@ -4601,7 +4603,7 @@
         </p:nvSpPr>
         <p:spPr>
           <a:xfrm>
-            <a:off x="166029" y="2548245"/>
+            <a:off x="86076" y="1841777"/>
             <a:ext cx="5506072" cy="4207421"/>
           </a:xfrm>
           <a:prstGeom prst="rect">
@@ -4775,82 +4777,44 @@
             </a:lvl9pPr>
           </a:lstStyle>
           <a:p>
-            <a:pPr algn="l"/>
-            <a:r>
-              <a:rPr lang="en-US" b="1" i="0" dirty="0">
-                <a:solidFill>
-                  <a:srgbClr val="262524"/>
-                </a:solidFill>
-                <a:effectLst/>
-                <a:latin typeface="Geekflare"/>
-              </a:rPr>
-              <a:t>Shard</a:t>
-            </a:r>
-            <a:r>
-              <a:rPr lang="en-US" b="0" i="0" dirty="0">
-                <a:solidFill>
-                  <a:srgbClr val="262524"/>
-                </a:solidFill>
-                <a:effectLst/>
-                <a:latin typeface="Geekflare"/>
-              </a:rPr>
-              <a:t> is a Mongo instance to handle a subset of original data.</a:t>
-            </a:r>
-          </a:p>
-          <a:p>
-            <a:pPr algn="l"/>
-            <a:r>
-              <a:rPr lang="en-US" b="1" i="0" dirty="0">
-                <a:solidFill>
-                  <a:srgbClr val="262524"/>
-                </a:solidFill>
-                <a:effectLst/>
-                <a:latin typeface="Geekflare"/>
-              </a:rPr>
-              <a:t>Mongos</a:t>
-            </a:r>
-            <a:r>
-              <a:rPr lang="en-US" b="0" i="0" dirty="0">
-                <a:solidFill>
-                  <a:srgbClr val="262524"/>
-                </a:solidFill>
-                <a:effectLst/>
-                <a:latin typeface="Geekflare"/>
-              </a:rPr>
-              <a:t> is a query router to shards.</a:t>
-            </a:r>
-          </a:p>
-          <a:p>
-            <a:pPr algn="l"/>
-            <a:r>
-              <a:rPr lang="en-US" b="1" i="0" dirty="0">
-                <a:solidFill>
-                  <a:srgbClr val="262524"/>
-                </a:solidFill>
-                <a:effectLst/>
-                <a:latin typeface="Geekflare"/>
-              </a:rPr>
-              <a:t>Config Server</a:t>
-            </a:r>
-            <a:r>
-              <a:rPr lang="en-US" b="0" i="0" dirty="0">
-                <a:solidFill>
-                  <a:srgbClr val="262524"/>
-                </a:solidFill>
-                <a:effectLst/>
-                <a:latin typeface="Geekflare"/>
-              </a:rPr>
-              <a:t> is a Mongo instance which stores metadata information and configuration details of cluster. </a:t>
-            </a:r>
+            <a:pPr>
+              <a:defRPr/>
+            </a:pPr>
+            <a:r>
+              <a:rPr lang="en-US" dirty="0"/>
+              <a:t>Sharding is a method for distributing data across multiple machines. </a:t>
+            </a:r>
+          </a:p>
+          <a:p>
+            <a:pPr>
+              <a:defRPr/>
+            </a:pPr>
+            <a:r>
+              <a:rPr lang="en-US" dirty="0"/>
+              <a:t>MongoDB uses </a:t>
+            </a:r>
+            <a:r>
+              <a:rPr lang="en-US" dirty="0" err="1"/>
+              <a:t>sharding</a:t>
+            </a:r>
+            <a:r>
+              <a:rPr lang="en-US" dirty="0"/>
+              <a:t> to support deployments with very large data sets and </a:t>
+            </a:r>
+            <a:r>
+              <a:rPr lang="en-US" b="1" dirty="0"/>
+              <a:t>high throughput operations.</a:t>
+            </a:r>
+            <a:endParaRPr lang="hu-HU" b="1" dirty="0"/>
           </a:p>
         </p:txBody>
       </p:sp>
       <p:pic>
         <p:nvPicPr>
-          <p:cNvPr id="6" name="Picture 5">
+          <p:cNvPr id="11" name="Picture 10">
             <a:extLst>
               <a:ext uri="{FF2B5EF4-FFF2-40B4-BE49-F238E27FC236}">
-                <a16:creationId xmlns:a16="http://schemas.microsoft.com/office/drawing/2014/main" id="{EE12BD91-C18C-47AA-A5E5-2338563526A6}"/>
+                <a16:creationId xmlns:a16="http://schemas.microsoft.com/office/drawing/2014/main" id="{C21D4A4E-046A-46EC-B25E-D03847DD6BA1}"/>
               </a:ext>
             </a:extLst>
           </p:cNvPr>
@@ -4867,8 +4831,8 @@
         </p:blipFill>
         <p:spPr>
           <a:xfrm>
-            <a:off x="6117574" y="1789505"/>
-            <a:ext cx="6019800" cy="4311967"/>
+            <a:off x="6096000" y="1717776"/>
+            <a:ext cx="4145035" cy="4249274"/>
           </a:xfrm>
           <a:prstGeom prst="rect">
             <a:avLst/>
@@ -4878,7 +4842,7 @@
     </p:spTree>
     <p:extLst>
       <p:ext uri="{BB962C8B-B14F-4D97-AF65-F5344CB8AC3E}">
-        <p14:creationId xmlns:p14="http://schemas.microsoft.com/office/powerpoint/2010/main" val="801738330"/>
+        <p14:creationId xmlns:p14="http://schemas.microsoft.com/office/powerpoint/2010/main" val="525928724"/>
       </p:ext>
     </p:extLst>
   </p:cSld>
@@ -5862,6 +5826,1312 @@
         </p:nvSpPr>
         <p:spPr>
           <a:xfrm>
+            <a:off x="166029" y="179379"/>
+            <a:ext cx="6248527" cy="724247"/>
+          </a:xfrm>
+        </p:spPr>
+        <p:txBody>
+          <a:bodyPr>
+            <a:normAutofit fontScale="92500" lnSpcReduction="10000"/>
+          </a:bodyPr>
+          <a:lstStyle/>
+          <a:p>
+            <a:pPr algn="l" eaLnBrk="1" hangingPunct="1"/>
+            <a:r>
+              <a:rPr lang="en-US" altLang="zh-CN" sz="5400" dirty="0">
+                <a:solidFill>
+                  <a:schemeClr val="accent3"/>
+                </a:solidFill>
+                <a:latin typeface="Calibri" panose="020F0502020204030204" pitchFamily="34" charset="0"/>
+              </a:rPr>
+              <a:t>Sharding Architecture </a:t>
+            </a:r>
+            <a:endParaRPr lang="zh-CN" altLang="zh-CN" sz="5400" dirty="0">
+              <a:solidFill>
+                <a:schemeClr val="accent3"/>
+              </a:solidFill>
+              <a:latin typeface="Calibri" panose="020F0502020204030204" pitchFamily="34" charset="0"/>
+            </a:endParaRPr>
+          </a:p>
+        </p:txBody>
+      </p:sp>
+      <p:sp>
+        <p:nvSpPr>
+          <p:cNvPr id="9" name="Tartalom helye 2">
+            <a:extLst>
+              <a:ext uri="{FF2B5EF4-FFF2-40B4-BE49-F238E27FC236}">
+                <a16:creationId xmlns:a16="http://schemas.microsoft.com/office/drawing/2014/main" id="{2F1C6C22-045E-40E1-90CB-130576644F0F}"/>
+              </a:ext>
+            </a:extLst>
+          </p:cNvPr>
+          <p:cNvSpPr txBox="1">
+            <a:spLocks/>
+          </p:cNvSpPr>
+          <p:nvPr/>
+        </p:nvSpPr>
+        <p:spPr>
+          <a:xfrm>
+            <a:off x="166029" y="2548245"/>
+            <a:ext cx="5506072" cy="4207421"/>
+          </a:xfrm>
+          <a:prstGeom prst="rect">
+            <a:avLst/>
+          </a:prstGeom>
+        </p:spPr>
+        <p:txBody>
+          <a:bodyPr/>
+          <a:lstStyle>
+            <a:lvl1pPr marL="228600" indent="-228600" algn="l" defTabSz="914400" rtl="0" eaLnBrk="1" latinLnBrk="0" hangingPunct="1">
+              <a:lnSpc>
+                <a:spcPct val="90000"/>
+              </a:lnSpc>
+              <a:spcBef>
+                <a:spcPts val="1000"/>
+              </a:spcBef>
+              <a:buFont typeface="Arial" panose="020B0604020202020204" pitchFamily="34" charset="0"/>
+              <a:buChar char="•"/>
+              <a:defRPr sz="2800" kern="1200">
+                <a:solidFill>
+                  <a:schemeClr val="tx1"/>
+                </a:solidFill>
+                <a:latin typeface="+mn-lt"/>
+                <a:ea typeface="+mn-ea"/>
+                <a:cs typeface="+mn-cs"/>
+              </a:defRPr>
+            </a:lvl1pPr>
+            <a:lvl2pPr marL="685800" indent="-228600" algn="l" defTabSz="914400" rtl="0" eaLnBrk="1" latinLnBrk="0" hangingPunct="1">
+              <a:lnSpc>
+                <a:spcPct val="90000"/>
+              </a:lnSpc>
+              <a:spcBef>
+                <a:spcPts val="500"/>
+              </a:spcBef>
+              <a:buFont typeface="Arial" panose="020B0604020202020204" pitchFamily="34" charset="0"/>
+              <a:buChar char="•"/>
+              <a:defRPr sz="2400" kern="1200">
+                <a:solidFill>
+                  <a:schemeClr val="tx1"/>
+                </a:solidFill>
+                <a:latin typeface="+mn-lt"/>
+                <a:ea typeface="+mn-ea"/>
+                <a:cs typeface="+mn-cs"/>
+              </a:defRPr>
+            </a:lvl2pPr>
+            <a:lvl3pPr marL="1143000" indent="-228600" algn="l" defTabSz="914400" rtl="0" eaLnBrk="1" latinLnBrk="0" hangingPunct="1">
+              <a:lnSpc>
+                <a:spcPct val="90000"/>
+              </a:lnSpc>
+              <a:spcBef>
+                <a:spcPts val="500"/>
+              </a:spcBef>
+              <a:buFont typeface="Arial" panose="020B0604020202020204" pitchFamily="34" charset="0"/>
+              <a:buChar char="•"/>
+              <a:defRPr sz="2000" kern="1200">
+                <a:solidFill>
+                  <a:schemeClr val="tx1"/>
+                </a:solidFill>
+                <a:latin typeface="+mn-lt"/>
+                <a:ea typeface="+mn-ea"/>
+                <a:cs typeface="+mn-cs"/>
+              </a:defRPr>
+            </a:lvl3pPr>
+            <a:lvl4pPr marL="1600200" indent="-228600" algn="l" defTabSz="914400" rtl="0" eaLnBrk="1" latinLnBrk="0" hangingPunct="1">
+              <a:lnSpc>
+                <a:spcPct val="90000"/>
+              </a:lnSpc>
+              <a:spcBef>
+                <a:spcPts val="500"/>
+              </a:spcBef>
+              <a:buFont typeface="Arial" panose="020B0604020202020204" pitchFamily="34" charset="0"/>
+              <a:buChar char="•"/>
+              <a:defRPr sz="1800" kern="1200">
+                <a:solidFill>
+                  <a:schemeClr val="tx1"/>
+                </a:solidFill>
+                <a:latin typeface="+mn-lt"/>
+                <a:ea typeface="+mn-ea"/>
+                <a:cs typeface="+mn-cs"/>
+              </a:defRPr>
+            </a:lvl4pPr>
+            <a:lvl5pPr marL="2057400" indent="-228600" algn="l" defTabSz="914400" rtl="0" eaLnBrk="1" latinLnBrk="0" hangingPunct="1">
+              <a:lnSpc>
+                <a:spcPct val="90000"/>
+              </a:lnSpc>
+              <a:spcBef>
+                <a:spcPts val="500"/>
+              </a:spcBef>
+              <a:buFont typeface="Arial" panose="020B0604020202020204" pitchFamily="34" charset="0"/>
+              <a:buChar char="•"/>
+              <a:defRPr sz="1800" kern="1200">
+                <a:solidFill>
+                  <a:schemeClr val="tx1"/>
+                </a:solidFill>
+                <a:latin typeface="+mn-lt"/>
+                <a:ea typeface="+mn-ea"/>
+                <a:cs typeface="+mn-cs"/>
+              </a:defRPr>
+            </a:lvl5pPr>
+            <a:lvl6pPr marL="2514600" indent="-228600" algn="l" defTabSz="914400" rtl="0" eaLnBrk="1" latinLnBrk="0" hangingPunct="1">
+              <a:lnSpc>
+                <a:spcPct val="90000"/>
+              </a:lnSpc>
+              <a:spcBef>
+                <a:spcPts val="500"/>
+              </a:spcBef>
+              <a:buFont typeface="Arial" panose="020B0604020202020204" pitchFamily="34" charset="0"/>
+              <a:buChar char="•"/>
+              <a:defRPr sz="1800" kern="1200">
+                <a:solidFill>
+                  <a:schemeClr val="tx1"/>
+                </a:solidFill>
+                <a:latin typeface="+mn-lt"/>
+                <a:ea typeface="+mn-ea"/>
+                <a:cs typeface="+mn-cs"/>
+              </a:defRPr>
+            </a:lvl6pPr>
+            <a:lvl7pPr marL="2971800" indent="-228600" algn="l" defTabSz="914400" rtl="0" eaLnBrk="1" latinLnBrk="0" hangingPunct="1">
+              <a:lnSpc>
+                <a:spcPct val="90000"/>
+              </a:lnSpc>
+              <a:spcBef>
+                <a:spcPts val="500"/>
+              </a:spcBef>
+              <a:buFont typeface="Arial" panose="020B0604020202020204" pitchFamily="34" charset="0"/>
+              <a:buChar char="•"/>
+              <a:defRPr sz="1800" kern="1200">
+                <a:solidFill>
+                  <a:schemeClr val="tx1"/>
+                </a:solidFill>
+                <a:latin typeface="+mn-lt"/>
+                <a:ea typeface="+mn-ea"/>
+                <a:cs typeface="+mn-cs"/>
+              </a:defRPr>
+            </a:lvl7pPr>
+            <a:lvl8pPr marL="3429000" indent="-228600" algn="l" defTabSz="914400" rtl="0" eaLnBrk="1" latinLnBrk="0" hangingPunct="1">
+              <a:lnSpc>
+                <a:spcPct val="90000"/>
+              </a:lnSpc>
+              <a:spcBef>
+                <a:spcPts val="500"/>
+              </a:spcBef>
+              <a:buFont typeface="Arial" panose="020B0604020202020204" pitchFamily="34" charset="0"/>
+              <a:buChar char="•"/>
+              <a:defRPr sz="1800" kern="1200">
+                <a:solidFill>
+                  <a:schemeClr val="tx1"/>
+                </a:solidFill>
+                <a:latin typeface="+mn-lt"/>
+                <a:ea typeface="+mn-ea"/>
+                <a:cs typeface="+mn-cs"/>
+              </a:defRPr>
+            </a:lvl8pPr>
+            <a:lvl9pPr marL="3886200" indent="-228600" algn="l" defTabSz="914400" rtl="0" eaLnBrk="1" latinLnBrk="0" hangingPunct="1">
+              <a:lnSpc>
+                <a:spcPct val="90000"/>
+              </a:lnSpc>
+              <a:spcBef>
+                <a:spcPts val="500"/>
+              </a:spcBef>
+              <a:buFont typeface="Arial" panose="020B0604020202020204" pitchFamily="34" charset="0"/>
+              <a:buChar char="•"/>
+              <a:defRPr sz="1800" kern="1200">
+                <a:solidFill>
+                  <a:schemeClr val="tx1"/>
+                </a:solidFill>
+                <a:latin typeface="+mn-lt"/>
+                <a:ea typeface="+mn-ea"/>
+                <a:cs typeface="+mn-cs"/>
+              </a:defRPr>
+            </a:lvl9pPr>
+          </a:lstStyle>
+          <a:p>
+            <a:pPr algn="l"/>
+            <a:r>
+              <a:rPr lang="en-US" b="1" i="0" dirty="0">
+                <a:solidFill>
+                  <a:srgbClr val="262524"/>
+                </a:solidFill>
+                <a:effectLst/>
+                <a:latin typeface="Geekflare"/>
+              </a:rPr>
+              <a:t>Shard</a:t>
+            </a:r>
+            <a:r>
+              <a:rPr lang="en-US" b="0" i="0" dirty="0">
+                <a:solidFill>
+                  <a:srgbClr val="262524"/>
+                </a:solidFill>
+                <a:effectLst/>
+                <a:latin typeface="Geekflare"/>
+              </a:rPr>
+              <a:t> is a Mongo instance to handle a subset of original data.</a:t>
+            </a:r>
+          </a:p>
+          <a:p>
+            <a:pPr algn="l"/>
+            <a:r>
+              <a:rPr lang="en-US" b="1" i="0" dirty="0">
+                <a:solidFill>
+                  <a:srgbClr val="262524"/>
+                </a:solidFill>
+                <a:effectLst/>
+                <a:latin typeface="Geekflare"/>
+              </a:rPr>
+              <a:t>Mongos</a:t>
+            </a:r>
+            <a:r>
+              <a:rPr lang="en-US" b="0" i="0" dirty="0">
+                <a:solidFill>
+                  <a:srgbClr val="262524"/>
+                </a:solidFill>
+                <a:effectLst/>
+                <a:latin typeface="Geekflare"/>
+              </a:rPr>
+              <a:t> is a query router to shards.</a:t>
+            </a:r>
+          </a:p>
+          <a:p>
+            <a:pPr algn="l"/>
+            <a:r>
+              <a:rPr lang="en-US" b="1" i="0" dirty="0">
+                <a:solidFill>
+                  <a:srgbClr val="262524"/>
+                </a:solidFill>
+                <a:effectLst/>
+                <a:latin typeface="Geekflare"/>
+              </a:rPr>
+              <a:t>Config Server</a:t>
+            </a:r>
+            <a:r>
+              <a:rPr lang="en-US" b="0" i="0" dirty="0">
+                <a:solidFill>
+                  <a:srgbClr val="262524"/>
+                </a:solidFill>
+                <a:effectLst/>
+                <a:latin typeface="Geekflare"/>
+              </a:rPr>
+              <a:t> is a Mongo instance which stores metadata information and configuration details of cluster. </a:t>
+            </a:r>
+          </a:p>
+        </p:txBody>
+      </p:sp>
+      <p:pic>
+        <p:nvPicPr>
+          <p:cNvPr id="6" name="Picture 5">
+            <a:extLst>
+              <a:ext uri="{FF2B5EF4-FFF2-40B4-BE49-F238E27FC236}">
+                <a16:creationId xmlns:a16="http://schemas.microsoft.com/office/drawing/2014/main" id="{EE12BD91-C18C-47AA-A5E5-2338563526A6}"/>
+              </a:ext>
+            </a:extLst>
+          </p:cNvPr>
+          <p:cNvPicPr>
+            <a:picLocks noChangeAspect="1"/>
+          </p:cNvPicPr>
+          <p:nvPr/>
+        </p:nvPicPr>
+        <p:blipFill>
+          <a:blip r:embed="rId2"/>
+          <a:stretch>
+            <a:fillRect/>
+          </a:stretch>
+        </p:blipFill>
+        <p:spPr>
+          <a:xfrm>
+            <a:off x="6117574" y="1789505"/>
+            <a:ext cx="6019800" cy="4311967"/>
+          </a:xfrm>
+          <a:prstGeom prst="rect">
+            <a:avLst/>
+          </a:prstGeom>
+        </p:spPr>
+      </p:pic>
+    </p:spTree>
+    <p:extLst>
+      <p:ext uri="{BB962C8B-B14F-4D97-AF65-F5344CB8AC3E}">
+        <p14:creationId xmlns:p14="http://schemas.microsoft.com/office/powerpoint/2010/main" val="801738330"/>
+      </p:ext>
+    </p:extLst>
+  </p:cSld>
+  <p:clrMapOvr>
+    <a:masterClrMapping/>
+  </p:clrMapOvr>
+</p:sld>
+</file>
+
+<file path=ppt/slides/slide12.xml><?xml version="1.0" encoding="utf-8"?>
+<p:sld xmlns:a="http://schemas.openxmlformats.org/drawingml/2006/main" xmlns:r="http://schemas.openxmlformats.org/officeDocument/2006/relationships" xmlns:p="http://schemas.openxmlformats.org/presentationml/2006/main">
+  <p:cSld>
+    <p:spTree>
+      <p:nvGrpSpPr>
+        <p:cNvPr id="1" name=""/>
+        <p:cNvGrpSpPr/>
+        <p:nvPr/>
+      </p:nvGrpSpPr>
+      <p:grpSpPr>
+        <a:xfrm>
+          <a:off x="0" y="0"/>
+          <a:ext cx="0" cy="0"/>
+          <a:chOff x="0" y="0"/>
+          <a:chExt cx="0" cy="0"/>
+        </a:xfrm>
+      </p:grpSpPr>
+      <p:sp>
+        <p:nvSpPr>
+          <p:cNvPr id="87" name="Rectangle 16">
+            <a:extLst>
+              <a:ext uri="{FF2B5EF4-FFF2-40B4-BE49-F238E27FC236}">
+                <a16:creationId xmlns:a16="http://schemas.microsoft.com/office/drawing/2014/main" id="{8D4310E1-3B0E-4BB6-BB7C-F54A7503EA98}"/>
+              </a:ext>
+            </a:extLst>
+          </p:cNvPr>
+          <p:cNvSpPr/>
+          <p:nvPr/>
+        </p:nvSpPr>
+        <p:spPr>
+          <a:xfrm rot="2700000">
+            <a:off x="3895195" y="3640429"/>
+            <a:ext cx="298064" cy="534373"/>
+          </a:xfrm>
+          <a:custGeom>
+            <a:avLst/>
+            <a:gdLst/>
+            <a:ahLst/>
+            <a:cxnLst/>
+            <a:rect l="l" t="t" r="r" b="b"/>
+            <a:pathLst>
+              <a:path w="2232248" h="4001999">
+                <a:moveTo>
+                  <a:pt x="1116887" y="0"/>
+                </a:moveTo>
+                <a:cubicBezTo>
+                  <a:pt x="1270748" y="4762"/>
+                  <a:pt x="1433283" y="120651"/>
+                  <a:pt x="1447291" y="308459"/>
+                </a:cubicBezTo>
+                <a:cubicBezTo>
+                  <a:pt x="1483174" y="544979"/>
+                  <a:pt x="1283237" y="603082"/>
+                  <a:pt x="1339988" y="887363"/>
+                </a:cubicBezTo>
+                <a:lnTo>
+                  <a:pt x="2232248" y="887363"/>
+                </a:lnTo>
+                <a:lnTo>
+                  <a:pt x="2232248" y="1778237"/>
+                </a:lnTo>
+                <a:cubicBezTo>
+                  <a:pt x="1956566" y="1829261"/>
+                  <a:pt x="1897086" y="1634366"/>
+                  <a:pt x="1663321" y="1669832"/>
+                </a:cubicBezTo>
+                <a:cubicBezTo>
+                  <a:pt x="1475513" y="1683840"/>
+                  <a:pt x="1359624" y="1846375"/>
+                  <a:pt x="1354862" y="2000236"/>
+                </a:cubicBezTo>
+                <a:cubicBezTo>
+                  <a:pt x="1358037" y="2135389"/>
+                  <a:pt x="1477787" y="2334920"/>
+                  <a:pt x="1701420" y="2336507"/>
+                </a:cubicBezTo>
+                <a:cubicBezTo>
+                  <a:pt x="1972077" y="2308709"/>
+                  <a:pt x="1932339" y="2176007"/>
+                  <a:pt x="2232248" y="2187989"/>
+                </a:cubicBezTo>
+                <a:lnTo>
+                  <a:pt x="2232248" y="3119611"/>
+                </a:lnTo>
+                <a:lnTo>
+                  <a:pt x="1303259" y="3119611"/>
+                </a:lnTo>
+                <a:cubicBezTo>
+                  <a:pt x="1289664" y="3424971"/>
+                  <a:pt x="1423682" y="3383289"/>
+                  <a:pt x="1451633" y="3655441"/>
+                </a:cubicBezTo>
+                <a:cubicBezTo>
+                  <a:pt x="1450046" y="3879074"/>
+                  <a:pt x="1250515" y="3998824"/>
+                  <a:pt x="1115362" y="4001999"/>
+                </a:cubicBezTo>
+                <a:cubicBezTo>
+                  <a:pt x="961501" y="3997237"/>
+                  <a:pt x="798966" y="3881348"/>
+                  <a:pt x="784958" y="3693540"/>
+                </a:cubicBezTo>
+                <a:cubicBezTo>
+                  <a:pt x="749282" y="3458385"/>
+                  <a:pt x="946712" y="3399594"/>
+                  <a:pt x="892811" y="3119611"/>
+                </a:cubicBezTo>
+                <a:lnTo>
+                  <a:pt x="0" y="3119611"/>
+                </a:lnTo>
+                <a:lnTo>
+                  <a:pt x="0" y="2203607"/>
+                </a:lnTo>
+                <a:cubicBezTo>
+                  <a:pt x="285884" y="2145799"/>
+                  <a:pt x="343730" y="2346665"/>
+                  <a:pt x="580754" y="2310706"/>
+                </a:cubicBezTo>
+                <a:cubicBezTo>
+                  <a:pt x="768562" y="2296698"/>
+                  <a:pt x="884451" y="2134163"/>
+                  <a:pt x="889213" y="1980302"/>
+                </a:cubicBezTo>
+                <a:cubicBezTo>
+                  <a:pt x="886038" y="1845149"/>
+                  <a:pt x="766288" y="1645618"/>
+                  <a:pt x="542655" y="1644031"/>
+                </a:cubicBezTo>
+                <a:cubicBezTo>
+                  <a:pt x="268493" y="1672188"/>
+                  <a:pt x="312817" y="1807984"/>
+                  <a:pt x="0" y="1792208"/>
+                </a:cubicBezTo>
+                <a:lnTo>
+                  <a:pt x="0" y="887363"/>
+                </a:lnTo>
+                <a:lnTo>
+                  <a:pt x="928847" y="887363"/>
+                </a:lnTo>
+                <a:cubicBezTo>
+                  <a:pt x="944034" y="576570"/>
+                  <a:pt x="808718" y="620178"/>
+                  <a:pt x="780616" y="346558"/>
+                </a:cubicBezTo>
+                <a:cubicBezTo>
+                  <a:pt x="782203" y="122925"/>
+                  <a:pt x="981734" y="3175"/>
+                  <a:pt x="1116887" y="0"/>
+                </a:cubicBezTo>
+                <a:close/>
+              </a:path>
+            </a:pathLst>
+          </a:custGeom>
+          <a:solidFill>
+            <a:schemeClr val="bg1"/>
+          </a:solidFill>
+          <a:ln>
+            <a:noFill/>
+          </a:ln>
+        </p:spPr>
+        <p:style>
+          <a:lnRef idx="2">
+            <a:schemeClr val="accent1">
+              <a:shade val="50000"/>
+            </a:schemeClr>
+          </a:lnRef>
+          <a:fillRef idx="1">
+            <a:schemeClr val="accent1"/>
+          </a:fillRef>
+          <a:effectRef idx="0">
+            <a:schemeClr val="accent1"/>
+          </a:effectRef>
+          <a:fontRef idx="minor">
+            <a:schemeClr val="lt1"/>
+          </a:fontRef>
+        </p:style>
+        <p:txBody>
+          <a:bodyPr rtlCol="0" anchor="ctr"/>
+          <a:lstStyle>
+            <a:defPPr>
+              <a:defRPr lang="ko-KR"/>
+            </a:defPPr>
+            <a:lvl1pPr marL="0" algn="l" defTabSz="914400" rtl="0" eaLnBrk="1" latinLnBrk="1" hangingPunct="1">
+              <a:defRPr sz="1800" kern="1200">
+                <a:solidFill>
+                  <a:schemeClr val="lt1"/>
+                </a:solidFill>
+                <a:latin typeface="+mn-lt"/>
+                <a:ea typeface="+mn-ea"/>
+                <a:cs typeface="+mn-cs"/>
+              </a:defRPr>
+            </a:lvl1pPr>
+            <a:lvl2pPr marL="457200" algn="l" defTabSz="914400" rtl="0" eaLnBrk="1" latinLnBrk="1" hangingPunct="1">
+              <a:defRPr sz="1800" kern="1200">
+                <a:solidFill>
+                  <a:schemeClr val="lt1"/>
+                </a:solidFill>
+                <a:latin typeface="+mn-lt"/>
+                <a:ea typeface="+mn-ea"/>
+                <a:cs typeface="+mn-cs"/>
+              </a:defRPr>
+            </a:lvl2pPr>
+            <a:lvl3pPr marL="914400" algn="l" defTabSz="914400" rtl="0" eaLnBrk="1" latinLnBrk="1" hangingPunct="1">
+              <a:defRPr sz="1800" kern="1200">
+                <a:solidFill>
+                  <a:schemeClr val="lt1"/>
+                </a:solidFill>
+                <a:latin typeface="+mn-lt"/>
+                <a:ea typeface="+mn-ea"/>
+                <a:cs typeface="+mn-cs"/>
+              </a:defRPr>
+            </a:lvl3pPr>
+            <a:lvl4pPr marL="1371600" algn="l" defTabSz="914400" rtl="0" eaLnBrk="1" latinLnBrk="1" hangingPunct="1">
+              <a:defRPr sz="1800" kern="1200">
+                <a:solidFill>
+                  <a:schemeClr val="lt1"/>
+                </a:solidFill>
+                <a:latin typeface="+mn-lt"/>
+                <a:ea typeface="+mn-ea"/>
+                <a:cs typeface="+mn-cs"/>
+              </a:defRPr>
+            </a:lvl4pPr>
+            <a:lvl5pPr marL="1828800" algn="l" defTabSz="914400" rtl="0" eaLnBrk="1" latinLnBrk="1" hangingPunct="1">
+              <a:defRPr sz="1800" kern="1200">
+                <a:solidFill>
+                  <a:schemeClr val="lt1"/>
+                </a:solidFill>
+                <a:latin typeface="+mn-lt"/>
+                <a:ea typeface="+mn-ea"/>
+                <a:cs typeface="+mn-cs"/>
+              </a:defRPr>
+            </a:lvl5pPr>
+            <a:lvl6pPr marL="2286000" algn="l" defTabSz="914400" rtl="0" eaLnBrk="1" latinLnBrk="1" hangingPunct="1">
+              <a:defRPr sz="1800" kern="1200">
+                <a:solidFill>
+                  <a:schemeClr val="lt1"/>
+                </a:solidFill>
+                <a:latin typeface="+mn-lt"/>
+                <a:ea typeface="+mn-ea"/>
+                <a:cs typeface="+mn-cs"/>
+              </a:defRPr>
+            </a:lvl6pPr>
+            <a:lvl7pPr marL="2743200" algn="l" defTabSz="914400" rtl="0" eaLnBrk="1" latinLnBrk="1" hangingPunct="1">
+              <a:defRPr sz="1800" kern="1200">
+                <a:solidFill>
+                  <a:schemeClr val="lt1"/>
+                </a:solidFill>
+                <a:latin typeface="+mn-lt"/>
+                <a:ea typeface="+mn-ea"/>
+                <a:cs typeface="+mn-cs"/>
+              </a:defRPr>
+            </a:lvl7pPr>
+            <a:lvl8pPr marL="3200400" algn="l" defTabSz="914400" rtl="0" eaLnBrk="1" latinLnBrk="1" hangingPunct="1">
+              <a:defRPr sz="1800" kern="1200">
+                <a:solidFill>
+                  <a:schemeClr val="lt1"/>
+                </a:solidFill>
+                <a:latin typeface="+mn-lt"/>
+                <a:ea typeface="+mn-ea"/>
+                <a:cs typeface="+mn-cs"/>
+              </a:defRPr>
+            </a:lvl8pPr>
+            <a:lvl9pPr marL="3657600" algn="l" defTabSz="914400" rtl="0" eaLnBrk="1" latinLnBrk="1" hangingPunct="1">
+              <a:defRPr sz="1800" kern="1200">
+                <a:solidFill>
+                  <a:schemeClr val="lt1"/>
+                </a:solidFill>
+                <a:latin typeface="+mn-lt"/>
+                <a:ea typeface="+mn-ea"/>
+                <a:cs typeface="+mn-cs"/>
+              </a:defRPr>
+            </a:lvl9pPr>
+          </a:lstStyle>
+          <a:p>
+            <a:pPr algn="ctr"/>
+            <a:endParaRPr lang="ko-KR" altLang="en-US" dirty="0"/>
+          </a:p>
+        </p:txBody>
+      </p:sp>
+      <p:sp>
+        <p:nvSpPr>
+          <p:cNvPr id="88" name="Teardrop 1">
+            <a:extLst>
+              <a:ext uri="{FF2B5EF4-FFF2-40B4-BE49-F238E27FC236}">
+                <a16:creationId xmlns:a16="http://schemas.microsoft.com/office/drawing/2014/main" id="{55AB887A-9899-412F-A87A-6C68DA1273F3}"/>
+              </a:ext>
+            </a:extLst>
+          </p:cNvPr>
+          <p:cNvSpPr/>
+          <p:nvPr/>
+        </p:nvSpPr>
+        <p:spPr>
+          <a:xfrm rot="18805991">
+            <a:off x="5906366" y="3695853"/>
+            <a:ext cx="422416" cy="418009"/>
+          </a:xfrm>
+          <a:custGeom>
+            <a:avLst/>
+            <a:gdLst/>
+            <a:ahLst/>
+            <a:cxnLst/>
+            <a:rect l="l" t="t" r="r" b="b"/>
+            <a:pathLst>
+              <a:path w="1807241" h="1788383">
+                <a:moveTo>
+                  <a:pt x="712876" y="1117592"/>
+                </a:moveTo>
+                <a:cubicBezTo>
+                  <a:pt x="771173" y="1181828"/>
+                  <a:pt x="811089" y="1255910"/>
+                  <a:pt x="847925" y="1348018"/>
+                </a:cubicBezTo>
+                <a:cubicBezTo>
+                  <a:pt x="814544" y="1418896"/>
+                  <a:pt x="753893" y="1474052"/>
+                  <a:pt x="679064" y="1498332"/>
+                </a:cubicBezTo>
+                <a:lnTo>
+                  <a:pt x="308226" y="1106637"/>
+                </a:lnTo>
+                <a:cubicBezTo>
+                  <a:pt x="336560" y="1033247"/>
+                  <a:pt x="394949" y="975701"/>
+                  <a:pt x="467546" y="946245"/>
+                </a:cubicBezTo>
+                <a:cubicBezTo>
+                  <a:pt x="577903" y="998968"/>
+                  <a:pt x="654580" y="1053357"/>
+                  <a:pt x="712876" y="1117592"/>
+                </a:cubicBezTo>
+                <a:close/>
+                <a:moveTo>
+                  <a:pt x="1038527" y="398886"/>
+                </a:moveTo>
+                <a:lnTo>
+                  <a:pt x="1405560" y="786562"/>
+                </a:lnTo>
+                <a:cubicBezTo>
+                  <a:pt x="1374476" y="799049"/>
+                  <a:pt x="1340402" y="804299"/>
+                  <a:pt x="1305054" y="803332"/>
+                </a:cubicBezTo>
+                <a:lnTo>
+                  <a:pt x="1008167" y="795212"/>
+                </a:lnTo>
+                <a:lnTo>
+                  <a:pt x="1016288" y="498325"/>
+                </a:lnTo>
+                <a:cubicBezTo>
+                  <a:pt x="1017255" y="462976"/>
+                  <a:pt x="1024360" y="429240"/>
+                  <a:pt x="1038527" y="398886"/>
+                </a:cubicBezTo>
+                <a:close/>
+                <a:moveTo>
+                  <a:pt x="1097925" y="218888"/>
+                </a:moveTo>
+                <a:cubicBezTo>
+                  <a:pt x="992582" y="279303"/>
+                  <a:pt x="921871" y="392886"/>
+                  <a:pt x="921053" y="523256"/>
+                </a:cubicBezTo>
+                <a:lnTo>
+                  <a:pt x="919136" y="828763"/>
+                </a:lnTo>
+                <a:lnTo>
+                  <a:pt x="830924" y="915875"/>
+                </a:lnTo>
+                <a:lnTo>
+                  <a:pt x="525417" y="913958"/>
+                </a:lnTo>
+                <a:cubicBezTo>
+                  <a:pt x="403891" y="913196"/>
+                  <a:pt x="296188" y="973343"/>
+                  <a:pt x="234366" y="1067831"/>
+                </a:cubicBezTo>
+                <a:lnTo>
+                  <a:pt x="710285" y="1570519"/>
+                </a:lnTo>
+                <a:cubicBezTo>
+                  <a:pt x="811872" y="1510375"/>
+                  <a:pt x="878808" y="1399439"/>
+                  <a:pt x="879603" y="1272618"/>
+                </a:cubicBezTo>
+                <a:lnTo>
+                  <a:pt x="881520" y="967111"/>
+                </a:lnTo>
+                <a:lnTo>
+                  <a:pt x="969732" y="879999"/>
+                </a:lnTo>
+                <a:lnTo>
+                  <a:pt x="1275239" y="881916"/>
+                </a:lnTo>
+                <a:cubicBezTo>
+                  <a:pt x="1400271" y="882701"/>
+                  <a:pt x="1510670" y="819011"/>
+                  <a:pt x="1573529" y="721242"/>
+                </a:cubicBezTo>
+                <a:close/>
+                <a:moveTo>
+                  <a:pt x="1162945" y="27894"/>
+                </a:moveTo>
+                <a:lnTo>
+                  <a:pt x="1782798" y="682611"/>
+                </a:lnTo>
+                <a:cubicBezTo>
+                  <a:pt x="1816692" y="718411"/>
+                  <a:pt x="1815147" y="774907"/>
+                  <a:pt x="1779347" y="808801"/>
+                </a:cubicBezTo>
+                <a:cubicBezTo>
+                  <a:pt x="1743547" y="842694"/>
+                  <a:pt x="1687050" y="841149"/>
+                  <a:pt x="1653157" y="805349"/>
+                </a:cubicBezTo>
+                <a:lnTo>
+                  <a:pt x="1644015" y="795693"/>
+                </a:lnTo>
+                <a:cubicBezTo>
+                  <a:pt x="1561789" y="910282"/>
+                  <a:pt x="1426630" y="983636"/>
+                  <a:pt x="1274606" y="982683"/>
+                </a:cubicBezTo>
+                <a:lnTo>
+                  <a:pt x="980378" y="980836"/>
+                </a:lnTo>
+                <a:lnTo>
+                  <a:pt x="980378" y="1270380"/>
+                </a:lnTo>
+                <a:cubicBezTo>
+                  <a:pt x="980378" y="1427425"/>
+                  <a:pt x="901198" y="1565976"/>
+                  <a:pt x="779756" y="1647056"/>
+                </a:cubicBezTo>
+                <a:cubicBezTo>
+                  <a:pt x="807405" y="1681913"/>
+                  <a:pt x="803595" y="1732594"/>
+                  <a:pt x="770486" y="1763941"/>
+                </a:cubicBezTo>
+                <a:cubicBezTo>
+                  <a:pt x="734686" y="1797834"/>
+                  <a:pt x="678189" y="1796289"/>
+                  <a:pt x="644296" y="1760489"/>
+                </a:cubicBezTo>
+                <a:lnTo>
+                  <a:pt x="24442" y="1105772"/>
+                </a:lnTo>
+                <a:cubicBezTo>
+                  <a:pt x="-9451" y="1069973"/>
+                  <a:pt x="-7906" y="1013476"/>
+                  <a:pt x="27894" y="979583"/>
+                </a:cubicBezTo>
+                <a:cubicBezTo>
+                  <a:pt x="63694" y="945689"/>
+                  <a:pt x="120190" y="947235"/>
+                  <a:pt x="154084" y="983034"/>
+                </a:cubicBezTo>
+                <a:lnTo>
+                  <a:pt x="163237" y="992702"/>
+                </a:lnTo>
+                <a:cubicBezTo>
+                  <a:pt x="244774" y="882877"/>
+                  <a:pt x="375836" y="813180"/>
+                  <a:pt x="523178" y="813180"/>
+                </a:cubicBezTo>
+                <a:lnTo>
+                  <a:pt x="818460" y="813180"/>
+                </a:lnTo>
+                <a:lnTo>
+                  <a:pt x="820284" y="522622"/>
+                </a:lnTo>
+                <a:cubicBezTo>
+                  <a:pt x="821285" y="363119"/>
+                  <a:pt x="903845" y="223207"/>
+                  <a:pt x="1028952" y="143673"/>
+                </a:cubicBezTo>
+                <a:cubicBezTo>
+                  <a:pt x="999689" y="108599"/>
+                  <a:pt x="1002953" y="56445"/>
+                  <a:pt x="1036755" y="24443"/>
+                </a:cubicBezTo>
+                <a:cubicBezTo>
+                  <a:pt x="1072555" y="-9451"/>
+                  <a:pt x="1129052" y="-7906"/>
+                  <a:pt x="1162945" y="27894"/>
+                </a:cubicBezTo>
+                <a:close/>
+              </a:path>
+            </a:pathLst>
+          </a:custGeom>
+          <a:solidFill>
+            <a:schemeClr val="bg1"/>
+          </a:solidFill>
+          <a:ln>
+            <a:noFill/>
+          </a:ln>
+        </p:spPr>
+        <p:style>
+          <a:lnRef idx="2">
+            <a:schemeClr val="accent1">
+              <a:shade val="50000"/>
+            </a:schemeClr>
+          </a:lnRef>
+          <a:fillRef idx="1">
+            <a:schemeClr val="accent1"/>
+          </a:fillRef>
+          <a:effectRef idx="0">
+            <a:schemeClr val="accent1"/>
+          </a:effectRef>
+          <a:fontRef idx="minor">
+            <a:schemeClr val="lt1"/>
+          </a:fontRef>
+        </p:style>
+        <p:txBody>
+          <a:bodyPr rot="0" spcFirstLastPara="0" vert="horz" wrap="square" lIns="91440" tIns="45720" rIns="91440" bIns="45720" numCol="1" spcCol="0" rtlCol="0" fromWordArt="0" anchor="ctr" anchorCtr="0" forceAA="0" compatLnSpc="1">
+            <a:prstTxWarp prst="textNoShape">
+              <a:avLst/>
+            </a:prstTxWarp>
+            <a:noAutofit/>
+          </a:bodyPr>
+          <a:lstStyle>
+            <a:defPPr>
+              <a:defRPr lang="ko-KR"/>
+            </a:defPPr>
+            <a:lvl1pPr marL="0" algn="l" defTabSz="914400" rtl="0" eaLnBrk="1" latinLnBrk="1" hangingPunct="1">
+              <a:defRPr sz="1800" kern="1200">
+                <a:solidFill>
+                  <a:schemeClr val="lt1"/>
+                </a:solidFill>
+                <a:latin typeface="+mn-lt"/>
+                <a:ea typeface="+mn-ea"/>
+                <a:cs typeface="+mn-cs"/>
+              </a:defRPr>
+            </a:lvl1pPr>
+            <a:lvl2pPr marL="457200" algn="l" defTabSz="914400" rtl="0" eaLnBrk="1" latinLnBrk="1" hangingPunct="1">
+              <a:defRPr sz="1800" kern="1200">
+                <a:solidFill>
+                  <a:schemeClr val="lt1"/>
+                </a:solidFill>
+                <a:latin typeface="+mn-lt"/>
+                <a:ea typeface="+mn-ea"/>
+                <a:cs typeface="+mn-cs"/>
+              </a:defRPr>
+            </a:lvl2pPr>
+            <a:lvl3pPr marL="914400" algn="l" defTabSz="914400" rtl="0" eaLnBrk="1" latinLnBrk="1" hangingPunct="1">
+              <a:defRPr sz="1800" kern="1200">
+                <a:solidFill>
+                  <a:schemeClr val="lt1"/>
+                </a:solidFill>
+                <a:latin typeface="+mn-lt"/>
+                <a:ea typeface="+mn-ea"/>
+                <a:cs typeface="+mn-cs"/>
+              </a:defRPr>
+            </a:lvl3pPr>
+            <a:lvl4pPr marL="1371600" algn="l" defTabSz="914400" rtl="0" eaLnBrk="1" latinLnBrk="1" hangingPunct="1">
+              <a:defRPr sz="1800" kern="1200">
+                <a:solidFill>
+                  <a:schemeClr val="lt1"/>
+                </a:solidFill>
+                <a:latin typeface="+mn-lt"/>
+                <a:ea typeface="+mn-ea"/>
+                <a:cs typeface="+mn-cs"/>
+              </a:defRPr>
+            </a:lvl4pPr>
+            <a:lvl5pPr marL="1828800" algn="l" defTabSz="914400" rtl="0" eaLnBrk="1" latinLnBrk="1" hangingPunct="1">
+              <a:defRPr sz="1800" kern="1200">
+                <a:solidFill>
+                  <a:schemeClr val="lt1"/>
+                </a:solidFill>
+                <a:latin typeface="+mn-lt"/>
+                <a:ea typeface="+mn-ea"/>
+                <a:cs typeface="+mn-cs"/>
+              </a:defRPr>
+            </a:lvl5pPr>
+            <a:lvl6pPr marL="2286000" algn="l" defTabSz="914400" rtl="0" eaLnBrk="1" latinLnBrk="1" hangingPunct="1">
+              <a:defRPr sz="1800" kern="1200">
+                <a:solidFill>
+                  <a:schemeClr val="lt1"/>
+                </a:solidFill>
+                <a:latin typeface="+mn-lt"/>
+                <a:ea typeface="+mn-ea"/>
+                <a:cs typeface="+mn-cs"/>
+              </a:defRPr>
+            </a:lvl6pPr>
+            <a:lvl7pPr marL="2743200" algn="l" defTabSz="914400" rtl="0" eaLnBrk="1" latinLnBrk="1" hangingPunct="1">
+              <a:defRPr sz="1800" kern="1200">
+                <a:solidFill>
+                  <a:schemeClr val="lt1"/>
+                </a:solidFill>
+                <a:latin typeface="+mn-lt"/>
+                <a:ea typeface="+mn-ea"/>
+                <a:cs typeface="+mn-cs"/>
+              </a:defRPr>
+            </a:lvl7pPr>
+            <a:lvl8pPr marL="3200400" algn="l" defTabSz="914400" rtl="0" eaLnBrk="1" latinLnBrk="1" hangingPunct="1">
+              <a:defRPr sz="1800" kern="1200">
+                <a:solidFill>
+                  <a:schemeClr val="lt1"/>
+                </a:solidFill>
+                <a:latin typeface="+mn-lt"/>
+                <a:ea typeface="+mn-ea"/>
+                <a:cs typeface="+mn-cs"/>
+              </a:defRPr>
+            </a:lvl8pPr>
+            <a:lvl9pPr marL="3657600" algn="l" defTabSz="914400" rtl="0" eaLnBrk="1" latinLnBrk="1" hangingPunct="1">
+              <a:defRPr sz="1800" kern="1200">
+                <a:solidFill>
+                  <a:schemeClr val="lt1"/>
+                </a:solidFill>
+                <a:latin typeface="+mn-lt"/>
+                <a:ea typeface="+mn-ea"/>
+                <a:cs typeface="+mn-cs"/>
+              </a:defRPr>
+            </a:lvl9pPr>
+          </a:lstStyle>
+          <a:p>
+            <a:pPr algn="ctr"/>
+            <a:endParaRPr lang="ko-KR" altLang="en-US" dirty="0">
+              <a:solidFill>
+                <a:schemeClr val="tx1"/>
+              </a:solidFill>
+            </a:endParaRPr>
+          </a:p>
+        </p:txBody>
+      </p:sp>
+      <p:sp>
+        <p:nvSpPr>
+          <p:cNvPr id="89" name="Rectangle 130">
+            <a:extLst>
+              <a:ext uri="{FF2B5EF4-FFF2-40B4-BE49-F238E27FC236}">
+                <a16:creationId xmlns:a16="http://schemas.microsoft.com/office/drawing/2014/main" id="{E9F6910D-08B2-448E-9CBD-AF3616A1DD34}"/>
+              </a:ext>
+            </a:extLst>
+          </p:cNvPr>
+          <p:cNvSpPr/>
+          <p:nvPr/>
+        </p:nvSpPr>
+        <p:spPr>
+          <a:xfrm>
+            <a:off x="7986107" y="3713707"/>
+            <a:ext cx="379301" cy="381023"/>
+          </a:xfrm>
+          <a:custGeom>
+            <a:avLst/>
+            <a:gdLst/>
+            <a:ahLst/>
+            <a:cxnLst/>
+            <a:rect l="l" t="t" r="r" b="b"/>
+            <a:pathLst>
+              <a:path w="371900" h="373588">
+                <a:moveTo>
+                  <a:pt x="297080" y="129105"/>
+                </a:moveTo>
+                <a:lnTo>
+                  <a:pt x="284273" y="219737"/>
+                </a:lnTo>
+                <a:lnTo>
+                  <a:pt x="305496" y="219737"/>
+                </a:lnTo>
+                <a:lnTo>
+                  <a:pt x="333001" y="129105"/>
+                </a:lnTo>
+                <a:close/>
+                <a:moveTo>
+                  <a:pt x="228265" y="129105"/>
+                </a:moveTo>
+                <a:lnTo>
+                  <a:pt x="228265" y="219737"/>
+                </a:lnTo>
+                <a:lnTo>
+                  <a:pt x="250807" y="219737"/>
+                </a:lnTo>
+                <a:lnTo>
+                  <a:pt x="263614" y="129105"/>
+                </a:lnTo>
+                <a:close/>
+                <a:moveTo>
+                  <a:pt x="157021" y="129105"/>
+                </a:moveTo>
+                <a:lnTo>
+                  <a:pt x="175826" y="219737"/>
+                </a:lnTo>
+                <a:lnTo>
+                  <a:pt x="195129" y="219737"/>
+                </a:lnTo>
+                <a:lnTo>
+                  <a:pt x="195129" y="129105"/>
+                </a:lnTo>
+                <a:close/>
+                <a:moveTo>
+                  <a:pt x="93087" y="129105"/>
+                </a:moveTo>
+                <a:lnTo>
+                  <a:pt x="117372" y="219737"/>
+                </a:lnTo>
+                <a:lnTo>
+                  <a:pt x="141984" y="219737"/>
+                </a:lnTo>
+                <a:lnTo>
+                  <a:pt x="123179" y="129105"/>
+                </a:lnTo>
+                <a:close/>
+                <a:moveTo>
+                  <a:pt x="58494" y="0"/>
+                </a:moveTo>
+                <a:lnTo>
+                  <a:pt x="84208" y="95969"/>
+                </a:lnTo>
+                <a:lnTo>
+                  <a:pt x="354346" y="95969"/>
+                </a:lnTo>
+                <a:lnTo>
+                  <a:pt x="354346" y="97437"/>
+                </a:lnTo>
+                <a:cubicBezTo>
+                  <a:pt x="356087" y="96136"/>
+                  <a:pt x="357928" y="96353"/>
+                  <a:pt x="359747" y="96905"/>
+                </a:cubicBezTo>
+                <a:lnTo>
+                  <a:pt x="360371" y="97095"/>
+                </a:lnTo>
+                <a:cubicBezTo>
+                  <a:pt x="368954" y="99700"/>
+                  <a:pt x="373801" y="108770"/>
+                  <a:pt x="371196" y="117354"/>
+                </a:cubicBezTo>
+                <a:lnTo>
+                  <a:pt x="333339" y="242097"/>
+                </a:lnTo>
+                <a:cubicBezTo>
+                  <a:pt x="331591" y="247858"/>
+                  <a:pt x="326929" y="251935"/>
+                  <a:pt x="321206" y="252122"/>
+                </a:cubicBezTo>
+                <a:lnTo>
+                  <a:pt x="321206" y="252873"/>
+                </a:lnTo>
+                <a:lnTo>
+                  <a:pt x="313576" y="252873"/>
+                </a:lnTo>
+                <a:cubicBezTo>
+                  <a:pt x="313378" y="253010"/>
+                  <a:pt x="313229" y="252967"/>
+                  <a:pt x="313080" y="252922"/>
+                </a:cubicBezTo>
+                <a:lnTo>
+                  <a:pt x="312919" y="252873"/>
+                </a:lnTo>
+                <a:lnTo>
+                  <a:pt x="126251" y="252873"/>
+                </a:lnTo>
+                <a:lnTo>
+                  <a:pt x="133971" y="281687"/>
+                </a:lnTo>
+                <a:lnTo>
+                  <a:pt x="321075" y="281687"/>
+                </a:lnTo>
+                <a:lnTo>
+                  <a:pt x="321075" y="314823"/>
+                </a:lnTo>
+                <a:lnTo>
+                  <a:pt x="318480" y="314823"/>
+                </a:lnTo>
+                <a:cubicBezTo>
+                  <a:pt x="329614" y="318311"/>
+                  <a:pt x="336414" y="328969"/>
+                  <a:pt x="336414" y="341215"/>
+                </a:cubicBezTo>
+                <a:cubicBezTo>
+                  <a:pt x="336414" y="359094"/>
+                  <a:pt x="321920" y="373588"/>
+                  <a:pt x="304041" y="373588"/>
+                </a:cubicBezTo>
+                <a:cubicBezTo>
+                  <a:pt x="286162" y="373588"/>
+                  <a:pt x="271668" y="359094"/>
+                  <a:pt x="271668" y="341215"/>
+                </a:cubicBezTo>
+                <a:cubicBezTo>
+                  <a:pt x="271668" y="328969"/>
+                  <a:pt x="278468" y="318311"/>
+                  <a:pt x="289602" y="314823"/>
+                </a:cubicBezTo>
+                <a:lnTo>
+                  <a:pt x="142850" y="314823"/>
+                </a:lnTo>
+                <a:lnTo>
+                  <a:pt x="143397" y="316865"/>
+                </a:lnTo>
+                <a:cubicBezTo>
+                  <a:pt x="151629" y="321811"/>
+                  <a:pt x="156401" y="330956"/>
+                  <a:pt x="156401" y="341215"/>
+                </a:cubicBezTo>
+                <a:cubicBezTo>
+                  <a:pt x="156401" y="359094"/>
+                  <a:pt x="141907" y="373588"/>
+                  <a:pt x="124028" y="373588"/>
+                </a:cubicBezTo>
+                <a:cubicBezTo>
+                  <a:pt x="106149" y="373588"/>
+                  <a:pt x="91655" y="359094"/>
+                  <a:pt x="91655" y="341215"/>
+                </a:cubicBezTo>
+                <a:cubicBezTo>
+                  <a:pt x="91655" y="329356"/>
+                  <a:pt x="98032" y="318986"/>
+                  <a:pt x="108649" y="315212"/>
+                </a:cubicBezTo>
+                <a:lnTo>
+                  <a:pt x="33542" y="34909"/>
+                </a:lnTo>
+                <a:lnTo>
+                  <a:pt x="0" y="34909"/>
+                </a:lnTo>
+                <a:lnTo>
+                  <a:pt x="0" y="1773"/>
+                </a:lnTo>
+                <a:lnTo>
+                  <a:pt x="51879" y="1773"/>
+                </a:lnTo>
+                <a:close/>
+              </a:path>
+            </a:pathLst>
+          </a:custGeom>
+          <a:solidFill>
+            <a:schemeClr val="bg1"/>
+          </a:solidFill>
+          <a:ln>
+            <a:noFill/>
+          </a:ln>
+        </p:spPr>
+        <p:style>
+          <a:lnRef idx="2">
+            <a:schemeClr val="accent1">
+              <a:shade val="50000"/>
+            </a:schemeClr>
+          </a:lnRef>
+          <a:fillRef idx="1">
+            <a:schemeClr val="accent1"/>
+          </a:fillRef>
+          <a:effectRef idx="0">
+            <a:schemeClr val="accent1"/>
+          </a:effectRef>
+          <a:fontRef idx="minor">
+            <a:schemeClr val="lt1"/>
+          </a:fontRef>
+        </p:style>
+        <p:txBody>
+          <a:bodyPr rtlCol="0" anchor="ctr"/>
+          <a:lstStyle>
+            <a:defPPr>
+              <a:defRPr lang="ko-KR"/>
+            </a:defPPr>
+            <a:lvl1pPr marL="0" algn="l" defTabSz="914400" rtl="0" eaLnBrk="1" latinLnBrk="1" hangingPunct="1">
+              <a:defRPr sz="1800" kern="1200">
+                <a:solidFill>
+                  <a:schemeClr val="lt1"/>
+                </a:solidFill>
+                <a:latin typeface="+mn-lt"/>
+                <a:ea typeface="+mn-ea"/>
+                <a:cs typeface="+mn-cs"/>
+              </a:defRPr>
+            </a:lvl1pPr>
+            <a:lvl2pPr marL="457200" algn="l" defTabSz="914400" rtl="0" eaLnBrk="1" latinLnBrk="1" hangingPunct="1">
+              <a:defRPr sz="1800" kern="1200">
+                <a:solidFill>
+                  <a:schemeClr val="lt1"/>
+                </a:solidFill>
+                <a:latin typeface="+mn-lt"/>
+                <a:ea typeface="+mn-ea"/>
+                <a:cs typeface="+mn-cs"/>
+              </a:defRPr>
+            </a:lvl2pPr>
+            <a:lvl3pPr marL="914400" algn="l" defTabSz="914400" rtl="0" eaLnBrk="1" latinLnBrk="1" hangingPunct="1">
+              <a:defRPr sz="1800" kern="1200">
+                <a:solidFill>
+                  <a:schemeClr val="lt1"/>
+                </a:solidFill>
+                <a:latin typeface="+mn-lt"/>
+                <a:ea typeface="+mn-ea"/>
+                <a:cs typeface="+mn-cs"/>
+              </a:defRPr>
+            </a:lvl3pPr>
+            <a:lvl4pPr marL="1371600" algn="l" defTabSz="914400" rtl="0" eaLnBrk="1" latinLnBrk="1" hangingPunct="1">
+              <a:defRPr sz="1800" kern="1200">
+                <a:solidFill>
+                  <a:schemeClr val="lt1"/>
+                </a:solidFill>
+                <a:latin typeface="+mn-lt"/>
+                <a:ea typeface="+mn-ea"/>
+                <a:cs typeface="+mn-cs"/>
+              </a:defRPr>
+            </a:lvl4pPr>
+            <a:lvl5pPr marL="1828800" algn="l" defTabSz="914400" rtl="0" eaLnBrk="1" latinLnBrk="1" hangingPunct="1">
+              <a:defRPr sz="1800" kern="1200">
+                <a:solidFill>
+                  <a:schemeClr val="lt1"/>
+                </a:solidFill>
+                <a:latin typeface="+mn-lt"/>
+                <a:ea typeface="+mn-ea"/>
+                <a:cs typeface="+mn-cs"/>
+              </a:defRPr>
+            </a:lvl5pPr>
+            <a:lvl6pPr marL="2286000" algn="l" defTabSz="914400" rtl="0" eaLnBrk="1" latinLnBrk="1" hangingPunct="1">
+              <a:defRPr sz="1800" kern="1200">
+                <a:solidFill>
+                  <a:schemeClr val="lt1"/>
+                </a:solidFill>
+                <a:latin typeface="+mn-lt"/>
+                <a:ea typeface="+mn-ea"/>
+                <a:cs typeface="+mn-cs"/>
+              </a:defRPr>
+            </a:lvl6pPr>
+            <a:lvl7pPr marL="2743200" algn="l" defTabSz="914400" rtl="0" eaLnBrk="1" latinLnBrk="1" hangingPunct="1">
+              <a:defRPr sz="1800" kern="1200">
+                <a:solidFill>
+                  <a:schemeClr val="lt1"/>
+                </a:solidFill>
+                <a:latin typeface="+mn-lt"/>
+                <a:ea typeface="+mn-ea"/>
+                <a:cs typeface="+mn-cs"/>
+              </a:defRPr>
+            </a:lvl7pPr>
+            <a:lvl8pPr marL="3200400" algn="l" defTabSz="914400" rtl="0" eaLnBrk="1" latinLnBrk="1" hangingPunct="1">
+              <a:defRPr sz="1800" kern="1200">
+                <a:solidFill>
+                  <a:schemeClr val="lt1"/>
+                </a:solidFill>
+                <a:latin typeface="+mn-lt"/>
+                <a:ea typeface="+mn-ea"/>
+                <a:cs typeface="+mn-cs"/>
+              </a:defRPr>
+            </a:lvl8pPr>
+            <a:lvl9pPr marL="3657600" algn="l" defTabSz="914400" rtl="0" eaLnBrk="1" latinLnBrk="1" hangingPunct="1">
+              <a:defRPr sz="1800" kern="1200">
+                <a:solidFill>
+                  <a:schemeClr val="lt1"/>
+                </a:solidFill>
+                <a:latin typeface="+mn-lt"/>
+                <a:ea typeface="+mn-ea"/>
+                <a:cs typeface="+mn-cs"/>
+              </a:defRPr>
+            </a:lvl9pPr>
+          </a:lstStyle>
+          <a:p>
+            <a:pPr algn="ctr"/>
+            <a:endParaRPr lang="ko-KR" altLang="en-US" dirty="0">
+              <a:solidFill>
+                <a:schemeClr val="tx1"/>
+              </a:solidFill>
+            </a:endParaRPr>
+          </a:p>
+        </p:txBody>
+      </p:sp>
+      <p:sp>
+        <p:nvSpPr>
+          <p:cNvPr id="8" name="Text Placeholder 1">
+            <a:extLst>
+              <a:ext uri="{FF2B5EF4-FFF2-40B4-BE49-F238E27FC236}">
+                <a16:creationId xmlns:a16="http://schemas.microsoft.com/office/drawing/2014/main" id="{DE215665-D737-49D2-BE72-4AB6528C4855}"/>
+              </a:ext>
+            </a:extLst>
+          </p:cNvPr>
+          <p:cNvSpPr>
+            <a:spLocks noGrp="1"/>
+          </p:cNvSpPr>
+          <p:nvPr>
+            <p:ph type="body" sz="quarter" idx="10"/>
+          </p:nvPr>
+        </p:nvSpPr>
+        <p:spPr>
+          <a:xfrm>
             <a:off x="627957" y="314601"/>
             <a:ext cx="5925243" cy="724247"/>
           </a:xfrm>
@@ -6171,7 +7441,263 @@
 </p:sld>
 </file>
 
-<file path=ppt/slides/slide12.xml><?xml version="1.0" encoding="utf-8"?>
+<file path=ppt/slides/slide13.xml><?xml version="1.0" encoding="utf-8"?>
+<p:sld xmlns:a="http://schemas.openxmlformats.org/drawingml/2006/main" xmlns:r="http://schemas.openxmlformats.org/officeDocument/2006/relationships" xmlns:p="http://schemas.openxmlformats.org/presentationml/2006/main">
+  <p:cSld>
+    <p:spTree>
+      <p:nvGrpSpPr>
+        <p:cNvPr id="1" name=""/>
+        <p:cNvGrpSpPr/>
+        <p:nvPr/>
+      </p:nvGrpSpPr>
+      <p:grpSpPr>
+        <a:xfrm>
+          <a:off x="0" y="0"/>
+          <a:ext cx="0" cy="0"/>
+          <a:chOff x="0" y="0"/>
+          <a:chExt cx="0" cy="0"/>
+        </a:xfrm>
+      </p:grpSpPr>
+      <p:sp>
+        <p:nvSpPr>
+          <p:cNvPr id="2" name="Title 1">
+            <a:extLst>
+              <a:ext uri="{FF2B5EF4-FFF2-40B4-BE49-F238E27FC236}">
+                <a16:creationId xmlns:a16="http://schemas.microsoft.com/office/drawing/2014/main" id="{2A00419A-AD4D-F15F-61DA-1BE2C850CD32}"/>
+              </a:ext>
+            </a:extLst>
+          </p:cNvPr>
+          <p:cNvSpPr>
+            <a:spLocks noGrp="1"/>
+          </p:cNvSpPr>
+          <p:nvPr>
+            <p:ph type="title"/>
+          </p:nvPr>
+        </p:nvSpPr>
+        <p:spPr>
+          <a:xfrm>
+            <a:off x="838200" y="365126"/>
+            <a:ext cx="10515600" cy="429532"/>
+          </a:xfrm>
+        </p:spPr>
+        <p:txBody>
+          <a:bodyPr>
+            <a:normAutofit fontScale="90000"/>
+          </a:bodyPr>
+          <a:lstStyle/>
+          <a:p>
+            <a:r>
+              <a:rPr lang="en-IN" dirty="0"/>
+              <a:t>CRUD operations</a:t>
+            </a:r>
+          </a:p>
+        </p:txBody>
+      </p:sp>
+      <p:pic>
+        <p:nvPicPr>
+          <p:cNvPr id="6" name="Picture 5">
+            <a:extLst>
+              <a:ext uri="{FF2B5EF4-FFF2-40B4-BE49-F238E27FC236}">
+                <a16:creationId xmlns:a16="http://schemas.microsoft.com/office/drawing/2014/main" id="{7D3A8382-3E8F-8CED-FEA0-9A0FA503B26A}"/>
+              </a:ext>
+            </a:extLst>
+          </p:cNvPr>
+          <p:cNvPicPr>
+            <a:picLocks noChangeAspect="1"/>
+          </p:cNvPicPr>
+          <p:nvPr/>
+        </p:nvPicPr>
+        <p:blipFill>
+          <a:blip r:embed="rId2"/>
+          <a:stretch>
+            <a:fillRect/>
+          </a:stretch>
+        </p:blipFill>
+        <p:spPr>
+          <a:xfrm>
+            <a:off x="1122141" y="1230309"/>
+            <a:ext cx="4639323" cy="1452765"/>
+          </a:xfrm>
+          <a:prstGeom prst="rect">
+            <a:avLst/>
+          </a:prstGeom>
+        </p:spPr>
+      </p:pic>
+      <p:pic>
+        <p:nvPicPr>
+          <p:cNvPr id="8" name="Picture 7">
+            <a:extLst>
+              <a:ext uri="{FF2B5EF4-FFF2-40B4-BE49-F238E27FC236}">
+                <a16:creationId xmlns:a16="http://schemas.microsoft.com/office/drawing/2014/main" id="{4C9EC636-DC03-78B1-062D-CC031ED0855F}"/>
+              </a:ext>
+            </a:extLst>
+          </p:cNvPr>
+          <p:cNvPicPr>
+            <a:picLocks noChangeAspect="1"/>
+          </p:cNvPicPr>
+          <p:nvPr/>
+        </p:nvPicPr>
+        <p:blipFill>
+          <a:blip r:embed="rId3"/>
+          <a:stretch>
+            <a:fillRect/>
+          </a:stretch>
+        </p:blipFill>
+        <p:spPr>
+          <a:xfrm>
+            <a:off x="760778" y="3043035"/>
+            <a:ext cx="4967723" cy="891386"/>
+          </a:xfrm>
+          <a:prstGeom prst="rect">
+            <a:avLst/>
+          </a:prstGeom>
+        </p:spPr>
+      </p:pic>
+      <p:pic>
+        <p:nvPicPr>
+          <p:cNvPr id="10" name="Picture 9">
+            <a:extLst>
+              <a:ext uri="{FF2B5EF4-FFF2-40B4-BE49-F238E27FC236}">
+                <a16:creationId xmlns:a16="http://schemas.microsoft.com/office/drawing/2014/main" id="{D63AB3E0-2724-EECE-427A-4C62A6CB0E83}"/>
+              </a:ext>
+            </a:extLst>
+          </p:cNvPr>
+          <p:cNvPicPr>
+            <a:picLocks noChangeAspect="1"/>
+          </p:cNvPicPr>
+          <p:nvPr/>
+        </p:nvPicPr>
+        <p:blipFill>
+          <a:blip r:embed="rId3"/>
+          <a:stretch>
+            <a:fillRect/>
+          </a:stretch>
+        </p:blipFill>
+        <p:spPr>
+          <a:xfrm>
+            <a:off x="6430537" y="1230309"/>
+            <a:ext cx="5595916" cy="1004106"/>
+          </a:xfrm>
+          <a:prstGeom prst="rect">
+            <a:avLst/>
+          </a:prstGeom>
+        </p:spPr>
+      </p:pic>
+      <p:pic>
+        <p:nvPicPr>
+          <p:cNvPr id="12" name="Picture 11">
+            <a:extLst>
+              <a:ext uri="{FF2B5EF4-FFF2-40B4-BE49-F238E27FC236}">
+                <a16:creationId xmlns:a16="http://schemas.microsoft.com/office/drawing/2014/main" id="{52355E70-3FFE-92FA-2551-592A187C0B3A}"/>
+              </a:ext>
+            </a:extLst>
+          </p:cNvPr>
+          <p:cNvPicPr>
+            <a:picLocks noChangeAspect="1"/>
+          </p:cNvPicPr>
+          <p:nvPr/>
+        </p:nvPicPr>
+        <p:blipFill>
+          <a:blip r:embed="rId4"/>
+          <a:stretch>
+            <a:fillRect/>
+          </a:stretch>
+        </p:blipFill>
+        <p:spPr>
+          <a:xfrm>
+            <a:off x="6618208" y="3172315"/>
+            <a:ext cx="4572635" cy="762106"/>
+          </a:xfrm>
+          <a:prstGeom prst="rect">
+            <a:avLst/>
+          </a:prstGeom>
+        </p:spPr>
+      </p:pic>
+      <p:sp>
+        <p:nvSpPr>
+          <p:cNvPr id="14" name="TextBox 13">
+            <a:extLst>
+              <a:ext uri="{FF2B5EF4-FFF2-40B4-BE49-F238E27FC236}">
+                <a16:creationId xmlns:a16="http://schemas.microsoft.com/office/drawing/2014/main" id="{D50B78F8-7623-6031-39D4-8A3B07CD0961}"/>
+              </a:ext>
+            </a:extLst>
+          </p:cNvPr>
+          <p:cNvSpPr txBox="1"/>
+          <p:nvPr/>
+        </p:nvSpPr>
+        <p:spPr>
+          <a:xfrm>
+            <a:off x="3777037" y="5982003"/>
+            <a:ext cx="6096000" cy="369332"/>
+          </a:xfrm>
+          <a:prstGeom prst="rect">
+            <a:avLst/>
+          </a:prstGeom>
+          <a:noFill/>
+        </p:spPr>
+        <p:txBody>
+          <a:bodyPr wrap="square">
+            <a:spAutoFit/>
+          </a:bodyPr>
+          <a:lstStyle/>
+          <a:p>
+            <a:r>
+              <a:rPr lang="en-IN" dirty="0">
+                <a:hlinkClick r:id="rId5"/>
+              </a:rPr>
+              <a:t>https://www.mongodb.com/docs/manual/crud/</a:t>
+            </a:r>
+            <a:r>
+              <a:rPr lang="en-IN" dirty="0"/>
+              <a:t> </a:t>
+            </a:r>
+          </a:p>
+        </p:txBody>
+      </p:sp>
+      <p:pic>
+        <p:nvPicPr>
+          <p:cNvPr id="16" name="Picture 15">
+            <a:extLst>
+              <a:ext uri="{FF2B5EF4-FFF2-40B4-BE49-F238E27FC236}">
+                <a16:creationId xmlns:a16="http://schemas.microsoft.com/office/drawing/2014/main" id="{E6F3C804-4B97-4CC8-1801-F9778D9EAC08}"/>
+              </a:ext>
+            </a:extLst>
+          </p:cNvPr>
+          <p:cNvPicPr>
+            <a:picLocks noChangeAspect="1"/>
+          </p:cNvPicPr>
+          <p:nvPr/>
+        </p:nvPicPr>
+        <p:blipFill>
+          <a:blip r:embed="rId6"/>
+          <a:stretch>
+            <a:fillRect/>
+          </a:stretch>
+        </p:blipFill>
+        <p:spPr>
+          <a:xfrm>
+            <a:off x="2530929" y="4159818"/>
+            <a:ext cx="6906589" cy="1543265"/>
+          </a:xfrm>
+          <a:prstGeom prst="rect">
+            <a:avLst/>
+          </a:prstGeom>
+        </p:spPr>
+      </p:pic>
+    </p:spTree>
+    <p:extLst>
+      <p:ext uri="{BB962C8B-B14F-4D97-AF65-F5344CB8AC3E}">
+        <p14:creationId xmlns:p14="http://schemas.microsoft.com/office/powerpoint/2010/main" val="955054075"/>
+      </p:ext>
+    </p:extLst>
+  </p:cSld>
+  <p:clrMapOvr>
+    <a:masterClrMapping/>
+  </p:clrMapOvr>
+</p:sld>
+</file>
+
+<file path=ppt/slides/slide14.xml><?xml version="1.0" encoding="utf-8"?>
 <p:sld xmlns:a="http://schemas.openxmlformats.org/drawingml/2006/main" xmlns:r="http://schemas.openxmlformats.org/officeDocument/2006/relationships" xmlns:p="http://schemas.openxmlformats.org/presentationml/2006/main">
   <p:cSld>
     <p:spTree>
@@ -6494,7 +8020,7 @@
 </p:sld>
 </file>
 
-<file path=ppt/slides/slide13.xml><?xml version="1.0" encoding="utf-8"?>
+<file path=ppt/slides/slide15.xml><?xml version="1.0" encoding="utf-8"?>
 <p:sld xmlns:a="http://schemas.openxmlformats.org/drawingml/2006/main" xmlns:r="http://schemas.openxmlformats.org/officeDocument/2006/relationships" xmlns:p="http://schemas.openxmlformats.org/presentationml/2006/main">
   <p:cSld>
     <p:spTree>
@@ -6618,7 +8144,7 @@
 </p:sld>
 </file>
 
-<file path=ppt/slides/slide14.xml><?xml version="1.0" encoding="utf-8"?>
+<file path=ppt/slides/slide16.xml><?xml version="1.0" encoding="utf-8"?>
 <p:sld xmlns:a="http://schemas.openxmlformats.org/drawingml/2006/main" xmlns:r="http://schemas.openxmlformats.org/officeDocument/2006/relationships" xmlns:p="http://schemas.openxmlformats.org/presentationml/2006/main">
   <p:cSld>
     <p:spTree>
@@ -13857,14 +15383,14 @@
               <a:buChar char="•"/>
             </a:pPr>
             <a:r>
-              <a:rPr lang="en-US" sz="2400" b="1" i="0">
+              <a:rPr lang="en-US" sz="2400" b="1" i="0" dirty="0">
                 <a:effectLst/>
                 <a:latin typeface="__Source_Sans_3_a605e5"/>
               </a:rPr>
               <a:t>Durability</a:t>
             </a:r>
             <a:r>
-              <a:rPr lang="en-US" sz="2400" b="0" i="0">
+              <a:rPr lang="en-US" sz="2400" b="0" i="0" dirty="0">
                 <a:effectLst/>
                 <a:latin typeface="__Source_Sans_3_a605e5"/>
               </a:rPr>
@@ -13993,6 +15519,45 @@
           </a:p>
         </p:txBody>
       </p:sp>
+      <p:sp>
+        <p:nvSpPr>
+          <p:cNvPr id="3" name="TextBox 2">
+            <a:extLst>
+              <a:ext uri="{FF2B5EF4-FFF2-40B4-BE49-F238E27FC236}">
+                <a16:creationId xmlns:a16="http://schemas.microsoft.com/office/drawing/2014/main" id="{883F327D-8096-DB3E-6111-90A6D9D96125}"/>
+              </a:ext>
+            </a:extLst>
+          </p:cNvPr>
+          <p:cNvSpPr txBox="1"/>
+          <p:nvPr/>
+        </p:nvSpPr>
+        <p:spPr>
+          <a:xfrm>
+            <a:off x="4920343" y="311358"/>
+            <a:ext cx="7347857" cy="369332"/>
+          </a:xfrm>
+          <a:prstGeom prst="rect">
+            <a:avLst/>
+          </a:prstGeom>
+          <a:noFill/>
+        </p:spPr>
+        <p:txBody>
+          <a:bodyPr wrap="square" rtlCol="0">
+            <a:spAutoFit/>
+          </a:bodyPr>
+          <a:lstStyle/>
+          <a:p>
+            <a:r>
+              <a:rPr lang="en-IN" b="1" dirty="0">
+                <a:highlight>
+                  <a:srgbClr val="FFFF00"/>
+                </a:highlight>
+              </a:rPr>
+              <a:t>MongoDB is ACID compliant post v4.0</a:t>
+            </a:r>
+          </a:p>
+        </p:txBody>
+      </p:sp>
     </p:spTree>
     <p:extLst>
       <p:ext uri="{BB962C8B-B14F-4D97-AF65-F5344CB8AC3E}">
@@ -14007,6 +15572,181 @@
 </file>
 
 <file path=ppt/slides/slide7.xml><?xml version="1.0" encoding="utf-8"?>
+<p:sld xmlns:a="http://schemas.openxmlformats.org/drawingml/2006/main" xmlns:r="http://schemas.openxmlformats.org/officeDocument/2006/relationships" xmlns:p="http://schemas.openxmlformats.org/presentationml/2006/main">
+  <p:cSld>
+    <p:spTree>
+      <p:nvGrpSpPr>
+        <p:cNvPr id="1" name=""/>
+        <p:cNvGrpSpPr/>
+        <p:nvPr/>
+      </p:nvGrpSpPr>
+      <p:grpSpPr>
+        <a:xfrm>
+          <a:off x="0" y="0"/>
+          <a:ext cx="0" cy="0"/>
+          <a:chOff x="0" y="0"/>
+          <a:chExt cx="0" cy="0"/>
+        </a:xfrm>
+      </p:grpSpPr>
+      <p:sp>
+        <p:nvSpPr>
+          <p:cNvPr id="2" name="Title 1">
+            <a:extLst>
+              <a:ext uri="{FF2B5EF4-FFF2-40B4-BE49-F238E27FC236}">
+                <a16:creationId xmlns:a16="http://schemas.microsoft.com/office/drawing/2014/main" id="{2131004D-EC70-00C0-7318-D20E8FBC07E8}"/>
+              </a:ext>
+            </a:extLst>
+          </p:cNvPr>
+          <p:cNvSpPr>
+            <a:spLocks noGrp="1"/>
+          </p:cNvSpPr>
+          <p:nvPr>
+            <p:ph type="title"/>
+          </p:nvPr>
+        </p:nvSpPr>
+        <p:spPr>
+          <a:xfrm>
+            <a:off x="838200" y="365126"/>
+            <a:ext cx="8686800" cy="658132"/>
+          </a:xfrm>
+        </p:spPr>
+        <p:txBody>
+          <a:bodyPr>
+            <a:normAutofit fontScale="90000"/>
+          </a:bodyPr>
+          <a:lstStyle/>
+          <a:p>
+            <a:r>
+              <a:rPr lang="en-IN" dirty="0"/>
+              <a:t>Important Components</a:t>
+            </a:r>
+          </a:p>
+        </p:txBody>
+      </p:sp>
+      <p:sp>
+        <p:nvSpPr>
+          <p:cNvPr id="3" name="TextBox 2">
+            <a:extLst>
+              <a:ext uri="{FF2B5EF4-FFF2-40B4-BE49-F238E27FC236}">
+                <a16:creationId xmlns:a16="http://schemas.microsoft.com/office/drawing/2014/main" id="{29569AA9-E2CD-BEBB-84AE-EFA6DEAADDD6}"/>
+              </a:ext>
+            </a:extLst>
+          </p:cNvPr>
+          <p:cNvSpPr txBox="1"/>
+          <p:nvPr/>
+        </p:nvSpPr>
+        <p:spPr>
+          <a:xfrm>
+            <a:off x="1034143" y="1654629"/>
+            <a:ext cx="8991600" cy="2585323"/>
+          </a:xfrm>
+          <a:prstGeom prst="rect">
+            <a:avLst/>
+          </a:prstGeom>
+          <a:noFill/>
+        </p:spPr>
+        <p:txBody>
+          <a:bodyPr wrap="square" rtlCol="0">
+            <a:spAutoFit/>
+          </a:bodyPr>
+          <a:lstStyle/>
+          <a:p>
+            <a:pPr marL="285750" indent="-285750">
+              <a:buFont typeface="Arial" panose="020B0604020202020204" pitchFamily="34" charset="0"/>
+              <a:buChar char="•"/>
+            </a:pPr>
+            <a:r>
+              <a:rPr lang="en-IN" dirty="0"/>
+              <a:t>mongosh – Shell</a:t>
+            </a:r>
+          </a:p>
+          <a:p>
+            <a:pPr marL="285750" indent="-285750">
+              <a:buFont typeface="Arial" panose="020B0604020202020204" pitchFamily="34" charset="0"/>
+              <a:buChar char="•"/>
+            </a:pPr>
+            <a:endParaRPr lang="en-IN" dirty="0"/>
+          </a:p>
+          <a:p>
+            <a:pPr marL="285750" indent="-285750">
+              <a:buFont typeface="Arial" panose="020B0604020202020204" pitchFamily="34" charset="0"/>
+              <a:buChar char="•"/>
+            </a:pPr>
+            <a:r>
+              <a:rPr lang="en-IN" dirty="0"/>
+              <a:t>Compass – GUI</a:t>
+            </a:r>
+          </a:p>
+          <a:p>
+            <a:pPr marL="285750" indent="-285750">
+              <a:buFont typeface="Arial" panose="020B0604020202020204" pitchFamily="34" charset="0"/>
+              <a:buChar char="•"/>
+            </a:pPr>
+            <a:endParaRPr lang="en-IN" dirty="0"/>
+          </a:p>
+          <a:p>
+            <a:pPr marL="285750" indent="-285750">
+              <a:buFont typeface="Arial" panose="020B0604020202020204" pitchFamily="34" charset="0"/>
+              <a:buChar char="•"/>
+            </a:pPr>
+            <a:r>
+              <a:rPr lang="en-IN" dirty="0"/>
+              <a:t>Atlas – Managed Service hosted on AWS/Azure/GCP</a:t>
+            </a:r>
+          </a:p>
+          <a:p>
+            <a:pPr marL="742950" lvl="1" indent="-285750">
+              <a:buFont typeface="Arial" panose="020B0604020202020204" pitchFamily="34" charset="0"/>
+              <a:buChar char="•"/>
+            </a:pPr>
+            <a:r>
+              <a:rPr lang="en-IN" dirty="0"/>
+              <a:t>Serverless</a:t>
+            </a:r>
+          </a:p>
+          <a:p>
+            <a:pPr marL="742950" lvl="1" indent="-285750">
+              <a:buFont typeface="Arial" panose="020B0604020202020204" pitchFamily="34" charset="0"/>
+              <a:buChar char="•"/>
+            </a:pPr>
+            <a:r>
+              <a:rPr lang="en-IN" dirty="0"/>
+              <a:t>Dedicated</a:t>
+            </a:r>
+          </a:p>
+          <a:p>
+            <a:pPr marL="742950" lvl="1" indent="-285750">
+              <a:buFont typeface="Arial" panose="020B0604020202020204" pitchFamily="34" charset="0"/>
+              <a:buChar char="•"/>
+            </a:pPr>
+            <a:r>
+              <a:rPr lang="en-IN" dirty="0"/>
+              <a:t>Shared (Free Tier)</a:t>
+            </a:r>
+          </a:p>
+          <a:p>
+            <a:pPr marL="285750" indent="-285750">
+              <a:buFont typeface="Arial" panose="020B0604020202020204" pitchFamily="34" charset="0"/>
+              <a:buChar char="•"/>
+            </a:pPr>
+            <a:endParaRPr lang="en-IN" dirty="0"/>
+          </a:p>
+        </p:txBody>
+      </p:sp>
+    </p:spTree>
+    <p:extLst>
+      <p:ext uri="{BB962C8B-B14F-4D97-AF65-F5344CB8AC3E}">
+        <p14:creationId xmlns:p14="http://schemas.microsoft.com/office/powerpoint/2010/main" val="1221206974"/>
+      </p:ext>
+    </p:extLst>
+  </p:cSld>
+  <p:clrMapOvr>
+    <a:masterClrMapping/>
+  </p:clrMapOvr>
+</p:sld>
+</file>
+
+<file path=ppt/slides/slide8.xml><?xml version="1.0" encoding="utf-8"?>
 <p:sld xmlns:a="http://schemas.openxmlformats.org/drawingml/2006/main" xmlns:r="http://schemas.openxmlformats.org/officeDocument/2006/relationships" xmlns:p="http://schemas.openxmlformats.org/presentationml/2006/main">
   <p:cSld>
     <p:spTree>
@@ -15392,7 +17132,7 @@
 </p:sld>
 </file>
 
-<file path=ppt/slides/slide8.xml><?xml version="1.0" encoding="utf-8"?>
+<file path=ppt/slides/slide9.xml><?xml version="1.0" encoding="utf-8"?>
 <p:sld xmlns:a="http://schemas.openxmlformats.org/drawingml/2006/main" xmlns:r="http://schemas.openxmlformats.org/officeDocument/2006/relationships" xmlns:p="http://schemas.openxmlformats.org/presentationml/2006/main">
   <p:cSld>
     <p:spTree>
@@ -16549,1274 +18289,6 @@
     <p:extLst>
       <p:ext uri="{BB962C8B-B14F-4D97-AF65-F5344CB8AC3E}">
         <p14:creationId xmlns:p14="http://schemas.microsoft.com/office/powerpoint/2010/main" val="3011716388"/>
-      </p:ext>
-    </p:extLst>
-  </p:cSld>
-  <p:clrMapOvr>
-    <a:masterClrMapping/>
-  </p:clrMapOvr>
-</p:sld>
-</file>
-
-<file path=ppt/slides/slide9.xml><?xml version="1.0" encoding="utf-8"?>
-<p:sld xmlns:a="http://schemas.openxmlformats.org/drawingml/2006/main" xmlns:r="http://schemas.openxmlformats.org/officeDocument/2006/relationships" xmlns:p="http://schemas.openxmlformats.org/presentationml/2006/main">
-  <p:cSld>
-    <p:spTree>
-      <p:nvGrpSpPr>
-        <p:cNvPr id="1" name=""/>
-        <p:cNvGrpSpPr/>
-        <p:nvPr/>
-      </p:nvGrpSpPr>
-      <p:grpSpPr>
-        <a:xfrm>
-          <a:off x="0" y="0"/>
-          <a:ext cx="0" cy="0"/>
-          <a:chOff x="0" y="0"/>
-          <a:chExt cx="0" cy="0"/>
-        </a:xfrm>
-      </p:grpSpPr>
-      <p:sp>
-        <p:nvSpPr>
-          <p:cNvPr id="87" name="Rectangle 16">
-            <a:extLst>
-              <a:ext uri="{FF2B5EF4-FFF2-40B4-BE49-F238E27FC236}">
-                <a16:creationId xmlns:a16="http://schemas.microsoft.com/office/drawing/2014/main" id="{8D4310E1-3B0E-4BB6-BB7C-F54A7503EA98}"/>
-              </a:ext>
-            </a:extLst>
-          </p:cNvPr>
-          <p:cNvSpPr/>
-          <p:nvPr/>
-        </p:nvSpPr>
-        <p:spPr>
-          <a:xfrm rot="2700000">
-            <a:off x="3895195" y="3640429"/>
-            <a:ext cx="298064" cy="534373"/>
-          </a:xfrm>
-          <a:custGeom>
-            <a:avLst/>
-            <a:gdLst/>
-            <a:ahLst/>
-            <a:cxnLst/>
-            <a:rect l="l" t="t" r="r" b="b"/>
-            <a:pathLst>
-              <a:path w="2232248" h="4001999">
-                <a:moveTo>
-                  <a:pt x="1116887" y="0"/>
-                </a:moveTo>
-                <a:cubicBezTo>
-                  <a:pt x="1270748" y="4762"/>
-                  <a:pt x="1433283" y="120651"/>
-                  <a:pt x="1447291" y="308459"/>
-                </a:cubicBezTo>
-                <a:cubicBezTo>
-                  <a:pt x="1483174" y="544979"/>
-                  <a:pt x="1283237" y="603082"/>
-                  <a:pt x="1339988" y="887363"/>
-                </a:cubicBezTo>
-                <a:lnTo>
-                  <a:pt x="2232248" y="887363"/>
-                </a:lnTo>
-                <a:lnTo>
-                  <a:pt x="2232248" y="1778237"/>
-                </a:lnTo>
-                <a:cubicBezTo>
-                  <a:pt x="1956566" y="1829261"/>
-                  <a:pt x="1897086" y="1634366"/>
-                  <a:pt x="1663321" y="1669832"/>
-                </a:cubicBezTo>
-                <a:cubicBezTo>
-                  <a:pt x="1475513" y="1683840"/>
-                  <a:pt x="1359624" y="1846375"/>
-                  <a:pt x="1354862" y="2000236"/>
-                </a:cubicBezTo>
-                <a:cubicBezTo>
-                  <a:pt x="1358037" y="2135389"/>
-                  <a:pt x="1477787" y="2334920"/>
-                  <a:pt x="1701420" y="2336507"/>
-                </a:cubicBezTo>
-                <a:cubicBezTo>
-                  <a:pt x="1972077" y="2308709"/>
-                  <a:pt x="1932339" y="2176007"/>
-                  <a:pt x="2232248" y="2187989"/>
-                </a:cubicBezTo>
-                <a:lnTo>
-                  <a:pt x="2232248" y="3119611"/>
-                </a:lnTo>
-                <a:lnTo>
-                  <a:pt x="1303259" y="3119611"/>
-                </a:lnTo>
-                <a:cubicBezTo>
-                  <a:pt x="1289664" y="3424971"/>
-                  <a:pt x="1423682" y="3383289"/>
-                  <a:pt x="1451633" y="3655441"/>
-                </a:cubicBezTo>
-                <a:cubicBezTo>
-                  <a:pt x="1450046" y="3879074"/>
-                  <a:pt x="1250515" y="3998824"/>
-                  <a:pt x="1115362" y="4001999"/>
-                </a:cubicBezTo>
-                <a:cubicBezTo>
-                  <a:pt x="961501" y="3997237"/>
-                  <a:pt x="798966" y="3881348"/>
-                  <a:pt x="784958" y="3693540"/>
-                </a:cubicBezTo>
-                <a:cubicBezTo>
-                  <a:pt x="749282" y="3458385"/>
-                  <a:pt x="946712" y="3399594"/>
-                  <a:pt x="892811" y="3119611"/>
-                </a:cubicBezTo>
-                <a:lnTo>
-                  <a:pt x="0" y="3119611"/>
-                </a:lnTo>
-                <a:lnTo>
-                  <a:pt x="0" y="2203607"/>
-                </a:lnTo>
-                <a:cubicBezTo>
-                  <a:pt x="285884" y="2145799"/>
-                  <a:pt x="343730" y="2346665"/>
-                  <a:pt x="580754" y="2310706"/>
-                </a:cubicBezTo>
-                <a:cubicBezTo>
-                  <a:pt x="768562" y="2296698"/>
-                  <a:pt x="884451" y="2134163"/>
-                  <a:pt x="889213" y="1980302"/>
-                </a:cubicBezTo>
-                <a:cubicBezTo>
-                  <a:pt x="886038" y="1845149"/>
-                  <a:pt x="766288" y="1645618"/>
-                  <a:pt x="542655" y="1644031"/>
-                </a:cubicBezTo>
-                <a:cubicBezTo>
-                  <a:pt x="268493" y="1672188"/>
-                  <a:pt x="312817" y="1807984"/>
-                  <a:pt x="0" y="1792208"/>
-                </a:cubicBezTo>
-                <a:lnTo>
-                  <a:pt x="0" y="887363"/>
-                </a:lnTo>
-                <a:lnTo>
-                  <a:pt x="928847" y="887363"/>
-                </a:lnTo>
-                <a:cubicBezTo>
-                  <a:pt x="944034" y="576570"/>
-                  <a:pt x="808718" y="620178"/>
-                  <a:pt x="780616" y="346558"/>
-                </a:cubicBezTo>
-                <a:cubicBezTo>
-                  <a:pt x="782203" y="122925"/>
-                  <a:pt x="981734" y="3175"/>
-                  <a:pt x="1116887" y="0"/>
-                </a:cubicBezTo>
-                <a:close/>
-              </a:path>
-            </a:pathLst>
-          </a:custGeom>
-          <a:solidFill>
-            <a:schemeClr val="bg1"/>
-          </a:solidFill>
-          <a:ln>
-            <a:noFill/>
-          </a:ln>
-        </p:spPr>
-        <p:style>
-          <a:lnRef idx="2">
-            <a:schemeClr val="accent1">
-              <a:shade val="50000"/>
-            </a:schemeClr>
-          </a:lnRef>
-          <a:fillRef idx="1">
-            <a:schemeClr val="accent1"/>
-          </a:fillRef>
-          <a:effectRef idx="0">
-            <a:schemeClr val="accent1"/>
-          </a:effectRef>
-          <a:fontRef idx="minor">
-            <a:schemeClr val="lt1"/>
-          </a:fontRef>
-        </p:style>
-        <p:txBody>
-          <a:bodyPr rtlCol="0" anchor="ctr"/>
-          <a:lstStyle>
-            <a:defPPr>
-              <a:defRPr lang="ko-KR"/>
-            </a:defPPr>
-            <a:lvl1pPr marL="0" algn="l" defTabSz="914400" rtl="0" eaLnBrk="1" latinLnBrk="1" hangingPunct="1">
-              <a:defRPr sz="1800" kern="1200">
-                <a:solidFill>
-                  <a:schemeClr val="lt1"/>
-                </a:solidFill>
-                <a:latin typeface="+mn-lt"/>
-                <a:ea typeface="+mn-ea"/>
-                <a:cs typeface="+mn-cs"/>
-              </a:defRPr>
-            </a:lvl1pPr>
-            <a:lvl2pPr marL="457200" algn="l" defTabSz="914400" rtl="0" eaLnBrk="1" latinLnBrk="1" hangingPunct="1">
-              <a:defRPr sz="1800" kern="1200">
-                <a:solidFill>
-                  <a:schemeClr val="lt1"/>
-                </a:solidFill>
-                <a:latin typeface="+mn-lt"/>
-                <a:ea typeface="+mn-ea"/>
-                <a:cs typeface="+mn-cs"/>
-              </a:defRPr>
-            </a:lvl2pPr>
-            <a:lvl3pPr marL="914400" algn="l" defTabSz="914400" rtl="0" eaLnBrk="1" latinLnBrk="1" hangingPunct="1">
-              <a:defRPr sz="1800" kern="1200">
-                <a:solidFill>
-                  <a:schemeClr val="lt1"/>
-                </a:solidFill>
-                <a:latin typeface="+mn-lt"/>
-                <a:ea typeface="+mn-ea"/>
-                <a:cs typeface="+mn-cs"/>
-              </a:defRPr>
-            </a:lvl3pPr>
-            <a:lvl4pPr marL="1371600" algn="l" defTabSz="914400" rtl="0" eaLnBrk="1" latinLnBrk="1" hangingPunct="1">
-              <a:defRPr sz="1800" kern="1200">
-                <a:solidFill>
-                  <a:schemeClr val="lt1"/>
-                </a:solidFill>
-                <a:latin typeface="+mn-lt"/>
-                <a:ea typeface="+mn-ea"/>
-                <a:cs typeface="+mn-cs"/>
-              </a:defRPr>
-            </a:lvl4pPr>
-            <a:lvl5pPr marL="1828800" algn="l" defTabSz="914400" rtl="0" eaLnBrk="1" latinLnBrk="1" hangingPunct="1">
-              <a:defRPr sz="1800" kern="1200">
-                <a:solidFill>
-                  <a:schemeClr val="lt1"/>
-                </a:solidFill>
-                <a:latin typeface="+mn-lt"/>
-                <a:ea typeface="+mn-ea"/>
-                <a:cs typeface="+mn-cs"/>
-              </a:defRPr>
-            </a:lvl5pPr>
-            <a:lvl6pPr marL="2286000" algn="l" defTabSz="914400" rtl="0" eaLnBrk="1" latinLnBrk="1" hangingPunct="1">
-              <a:defRPr sz="1800" kern="1200">
-                <a:solidFill>
-                  <a:schemeClr val="lt1"/>
-                </a:solidFill>
-                <a:latin typeface="+mn-lt"/>
-                <a:ea typeface="+mn-ea"/>
-                <a:cs typeface="+mn-cs"/>
-              </a:defRPr>
-            </a:lvl6pPr>
-            <a:lvl7pPr marL="2743200" algn="l" defTabSz="914400" rtl="0" eaLnBrk="1" latinLnBrk="1" hangingPunct="1">
-              <a:defRPr sz="1800" kern="1200">
-                <a:solidFill>
-                  <a:schemeClr val="lt1"/>
-                </a:solidFill>
-                <a:latin typeface="+mn-lt"/>
-                <a:ea typeface="+mn-ea"/>
-                <a:cs typeface="+mn-cs"/>
-              </a:defRPr>
-            </a:lvl7pPr>
-            <a:lvl8pPr marL="3200400" algn="l" defTabSz="914400" rtl="0" eaLnBrk="1" latinLnBrk="1" hangingPunct="1">
-              <a:defRPr sz="1800" kern="1200">
-                <a:solidFill>
-                  <a:schemeClr val="lt1"/>
-                </a:solidFill>
-                <a:latin typeface="+mn-lt"/>
-                <a:ea typeface="+mn-ea"/>
-                <a:cs typeface="+mn-cs"/>
-              </a:defRPr>
-            </a:lvl8pPr>
-            <a:lvl9pPr marL="3657600" algn="l" defTabSz="914400" rtl="0" eaLnBrk="1" latinLnBrk="1" hangingPunct="1">
-              <a:defRPr sz="1800" kern="1200">
-                <a:solidFill>
-                  <a:schemeClr val="lt1"/>
-                </a:solidFill>
-                <a:latin typeface="+mn-lt"/>
-                <a:ea typeface="+mn-ea"/>
-                <a:cs typeface="+mn-cs"/>
-              </a:defRPr>
-            </a:lvl9pPr>
-          </a:lstStyle>
-          <a:p>
-            <a:pPr algn="ctr"/>
-            <a:endParaRPr lang="ko-KR" altLang="en-US" dirty="0"/>
-          </a:p>
-        </p:txBody>
-      </p:sp>
-      <p:sp>
-        <p:nvSpPr>
-          <p:cNvPr id="88" name="Teardrop 1">
-            <a:extLst>
-              <a:ext uri="{FF2B5EF4-FFF2-40B4-BE49-F238E27FC236}">
-                <a16:creationId xmlns:a16="http://schemas.microsoft.com/office/drawing/2014/main" id="{55AB887A-9899-412F-A87A-6C68DA1273F3}"/>
-              </a:ext>
-            </a:extLst>
-          </p:cNvPr>
-          <p:cNvSpPr/>
-          <p:nvPr/>
-        </p:nvSpPr>
-        <p:spPr>
-          <a:xfrm rot="18805991">
-            <a:off x="5906366" y="3695853"/>
-            <a:ext cx="422416" cy="418009"/>
-          </a:xfrm>
-          <a:custGeom>
-            <a:avLst/>
-            <a:gdLst/>
-            <a:ahLst/>
-            <a:cxnLst/>
-            <a:rect l="l" t="t" r="r" b="b"/>
-            <a:pathLst>
-              <a:path w="1807241" h="1788383">
-                <a:moveTo>
-                  <a:pt x="712876" y="1117592"/>
-                </a:moveTo>
-                <a:cubicBezTo>
-                  <a:pt x="771173" y="1181828"/>
-                  <a:pt x="811089" y="1255910"/>
-                  <a:pt x="847925" y="1348018"/>
-                </a:cubicBezTo>
-                <a:cubicBezTo>
-                  <a:pt x="814544" y="1418896"/>
-                  <a:pt x="753893" y="1474052"/>
-                  <a:pt x="679064" y="1498332"/>
-                </a:cubicBezTo>
-                <a:lnTo>
-                  <a:pt x="308226" y="1106637"/>
-                </a:lnTo>
-                <a:cubicBezTo>
-                  <a:pt x="336560" y="1033247"/>
-                  <a:pt x="394949" y="975701"/>
-                  <a:pt x="467546" y="946245"/>
-                </a:cubicBezTo>
-                <a:cubicBezTo>
-                  <a:pt x="577903" y="998968"/>
-                  <a:pt x="654580" y="1053357"/>
-                  <a:pt x="712876" y="1117592"/>
-                </a:cubicBezTo>
-                <a:close/>
-                <a:moveTo>
-                  <a:pt x="1038527" y="398886"/>
-                </a:moveTo>
-                <a:lnTo>
-                  <a:pt x="1405560" y="786562"/>
-                </a:lnTo>
-                <a:cubicBezTo>
-                  <a:pt x="1374476" y="799049"/>
-                  <a:pt x="1340402" y="804299"/>
-                  <a:pt x="1305054" y="803332"/>
-                </a:cubicBezTo>
-                <a:lnTo>
-                  <a:pt x="1008167" y="795212"/>
-                </a:lnTo>
-                <a:lnTo>
-                  <a:pt x="1016288" y="498325"/>
-                </a:lnTo>
-                <a:cubicBezTo>
-                  <a:pt x="1017255" y="462976"/>
-                  <a:pt x="1024360" y="429240"/>
-                  <a:pt x="1038527" y="398886"/>
-                </a:cubicBezTo>
-                <a:close/>
-                <a:moveTo>
-                  <a:pt x="1097925" y="218888"/>
-                </a:moveTo>
-                <a:cubicBezTo>
-                  <a:pt x="992582" y="279303"/>
-                  <a:pt x="921871" y="392886"/>
-                  <a:pt x="921053" y="523256"/>
-                </a:cubicBezTo>
-                <a:lnTo>
-                  <a:pt x="919136" y="828763"/>
-                </a:lnTo>
-                <a:lnTo>
-                  <a:pt x="830924" y="915875"/>
-                </a:lnTo>
-                <a:lnTo>
-                  <a:pt x="525417" y="913958"/>
-                </a:lnTo>
-                <a:cubicBezTo>
-                  <a:pt x="403891" y="913196"/>
-                  <a:pt x="296188" y="973343"/>
-                  <a:pt x="234366" y="1067831"/>
-                </a:cubicBezTo>
-                <a:lnTo>
-                  <a:pt x="710285" y="1570519"/>
-                </a:lnTo>
-                <a:cubicBezTo>
-                  <a:pt x="811872" y="1510375"/>
-                  <a:pt x="878808" y="1399439"/>
-                  <a:pt x="879603" y="1272618"/>
-                </a:cubicBezTo>
-                <a:lnTo>
-                  <a:pt x="881520" y="967111"/>
-                </a:lnTo>
-                <a:lnTo>
-                  <a:pt x="969732" y="879999"/>
-                </a:lnTo>
-                <a:lnTo>
-                  <a:pt x="1275239" y="881916"/>
-                </a:lnTo>
-                <a:cubicBezTo>
-                  <a:pt x="1400271" y="882701"/>
-                  <a:pt x="1510670" y="819011"/>
-                  <a:pt x="1573529" y="721242"/>
-                </a:cubicBezTo>
-                <a:close/>
-                <a:moveTo>
-                  <a:pt x="1162945" y="27894"/>
-                </a:moveTo>
-                <a:lnTo>
-                  <a:pt x="1782798" y="682611"/>
-                </a:lnTo>
-                <a:cubicBezTo>
-                  <a:pt x="1816692" y="718411"/>
-                  <a:pt x="1815147" y="774907"/>
-                  <a:pt x="1779347" y="808801"/>
-                </a:cubicBezTo>
-                <a:cubicBezTo>
-                  <a:pt x="1743547" y="842694"/>
-                  <a:pt x="1687050" y="841149"/>
-                  <a:pt x="1653157" y="805349"/>
-                </a:cubicBezTo>
-                <a:lnTo>
-                  <a:pt x="1644015" y="795693"/>
-                </a:lnTo>
-                <a:cubicBezTo>
-                  <a:pt x="1561789" y="910282"/>
-                  <a:pt x="1426630" y="983636"/>
-                  <a:pt x="1274606" y="982683"/>
-                </a:cubicBezTo>
-                <a:lnTo>
-                  <a:pt x="980378" y="980836"/>
-                </a:lnTo>
-                <a:lnTo>
-                  <a:pt x="980378" y="1270380"/>
-                </a:lnTo>
-                <a:cubicBezTo>
-                  <a:pt x="980378" y="1427425"/>
-                  <a:pt x="901198" y="1565976"/>
-                  <a:pt x="779756" y="1647056"/>
-                </a:cubicBezTo>
-                <a:cubicBezTo>
-                  <a:pt x="807405" y="1681913"/>
-                  <a:pt x="803595" y="1732594"/>
-                  <a:pt x="770486" y="1763941"/>
-                </a:cubicBezTo>
-                <a:cubicBezTo>
-                  <a:pt x="734686" y="1797834"/>
-                  <a:pt x="678189" y="1796289"/>
-                  <a:pt x="644296" y="1760489"/>
-                </a:cubicBezTo>
-                <a:lnTo>
-                  <a:pt x="24442" y="1105772"/>
-                </a:lnTo>
-                <a:cubicBezTo>
-                  <a:pt x="-9451" y="1069973"/>
-                  <a:pt x="-7906" y="1013476"/>
-                  <a:pt x="27894" y="979583"/>
-                </a:cubicBezTo>
-                <a:cubicBezTo>
-                  <a:pt x="63694" y="945689"/>
-                  <a:pt x="120190" y="947235"/>
-                  <a:pt x="154084" y="983034"/>
-                </a:cubicBezTo>
-                <a:lnTo>
-                  <a:pt x="163237" y="992702"/>
-                </a:lnTo>
-                <a:cubicBezTo>
-                  <a:pt x="244774" y="882877"/>
-                  <a:pt x="375836" y="813180"/>
-                  <a:pt x="523178" y="813180"/>
-                </a:cubicBezTo>
-                <a:lnTo>
-                  <a:pt x="818460" y="813180"/>
-                </a:lnTo>
-                <a:lnTo>
-                  <a:pt x="820284" y="522622"/>
-                </a:lnTo>
-                <a:cubicBezTo>
-                  <a:pt x="821285" y="363119"/>
-                  <a:pt x="903845" y="223207"/>
-                  <a:pt x="1028952" y="143673"/>
-                </a:cubicBezTo>
-                <a:cubicBezTo>
-                  <a:pt x="999689" y="108599"/>
-                  <a:pt x="1002953" y="56445"/>
-                  <a:pt x="1036755" y="24443"/>
-                </a:cubicBezTo>
-                <a:cubicBezTo>
-                  <a:pt x="1072555" y="-9451"/>
-                  <a:pt x="1129052" y="-7906"/>
-                  <a:pt x="1162945" y="27894"/>
-                </a:cubicBezTo>
-                <a:close/>
-              </a:path>
-            </a:pathLst>
-          </a:custGeom>
-          <a:solidFill>
-            <a:schemeClr val="bg1"/>
-          </a:solidFill>
-          <a:ln>
-            <a:noFill/>
-          </a:ln>
-        </p:spPr>
-        <p:style>
-          <a:lnRef idx="2">
-            <a:schemeClr val="accent1">
-              <a:shade val="50000"/>
-            </a:schemeClr>
-          </a:lnRef>
-          <a:fillRef idx="1">
-            <a:schemeClr val="accent1"/>
-          </a:fillRef>
-          <a:effectRef idx="0">
-            <a:schemeClr val="accent1"/>
-          </a:effectRef>
-          <a:fontRef idx="minor">
-            <a:schemeClr val="lt1"/>
-          </a:fontRef>
-        </p:style>
-        <p:txBody>
-          <a:bodyPr rot="0" spcFirstLastPara="0" vert="horz" wrap="square" lIns="91440" tIns="45720" rIns="91440" bIns="45720" numCol="1" spcCol="0" rtlCol="0" fromWordArt="0" anchor="ctr" anchorCtr="0" forceAA="0" compatLnSpc="1">
-            <a:prstTxWarp prst="textNoShape">
-              <a:avLst/>
-            </a:prstTxWarp>
-            <a:noAutofit/>
-          </a:bodyPr>
-          <a:lstStyle>
-            <a:defPPr>
-              <a:defRPr lang="ko-KR"/>
-            </a:defPPr>
-            <a:lvl1pPr marL="0" algn="l" defTabSz="914400" rtl="0" eaLnBrk="1" latinLnBrk="1" hangingPunct="1">
-              <a:defRPr sz="1800" kern="1200">
-                <a:solidFill>
-                  <a:schemeClr val="lt1"/>
-                </a:solidFill>
-                <a:latin typeface="+mn-lt"/>
-                <a:ea typeface="+mn-ea"/>
-                <a:cs typeface="+mn-cs"/>
-              </a:defRPr>
-            </a:lvl1pPr>
-            <a:lvl2pPr marL="457200" algn="l" defTabSz="914400" rtl="0" eaLnBrk="1" latinLnBrk="1" hangingPunct="1">
-              <a:defRPr sz="1800" kern="1200">
-                <a:solidFill>
-                  <a:schemeClr val="lt1"/>
-                </a:solidFill>
-                <a:latin typeface="+mn-lt"/>
-                <a:ea typeface="+mn-ea"/>
-                <a:cs typeface="+mn-cs"/>
-              </a:defRPr>
-            </a:lvl2pPr>
-            <a:lvl3pPr marL="914400" algn="l" defTabSz="914400" rtl="0" eaLnBrk="1" latinLnBrk="1" hangingPunct="1">
-              <a:defRPr sz="1800" kern="1200">
-                <a:solidFill>
-                  <a:schemeClr val="lt1"/>
-                </a:solidFill>
-                <a:latin typeface="+mn-lt"/>
-                <a:ea typeface="+mn-ea"/>
-                <a:cs typeface="+mn-cs"/>
-              </a:defRPr>
-            </a:lvl3pPr>
-            <a:lvl4pPr marL="1371600" algn="l" defTabSz="914400" rtl="0" eaLnBrk="1" latinLnBrk="1" hangingPunct="1">
-              <a:defRPr sz="1800" kern="1200">
-                <a:solidFill>
-                  <a:schemeClr val="lt1"/>
-                </a:solidFill>
-                <a:latin typeface="+mn-lt"/>
-                <a:ea typeface="+mn-ea"/>
-                <a:cs typeface="+mn-cs"/>
-              </a:defRPr>
-            </a:lvl4pPr>
-            <a:lvl5pPr marL="1828800" algn="l" defTabSz="914400" rtl="0" eaLnBrk="1" latinLnBrk="1" hangingPunct="1">
-              <a:defRPr sz="1800" kern="1200">
-                <a:solidFill>
-                  <a:schemeClr val="lt1"/>
-                </a:solidFill>
-                <a:latin typeface="+mn-lt"/>
-                <a:ea typeface="+mn-ea"/>
-                <a:cs typeface="+mn-cs"/>
-              </a:defRPr>
-            </a:lvl5pPr>
-            <a:lvl6pPr marL="2286000" algn="l" defTabSz="914400" rtl="0" eaLnBrk="1" latinLnBrk="1" hangingPunct="1">
-              <a:defRPr sz="1800" kern="1200">
-                <a:solidFill>
-                  <a:schemeClr val="lt1"/>
-                </a:solidFill>
-                <a:latin typeface="+mn-lt"/>
-                <a:ea typeface="+mn-ea"/>
-                <a:cs typeface="+mn-cs"/>
-              </a:defRPr>
-            </a:lvl6pPr>
-            <a:lvl7pPr marL="2743200" algn="l" defTabSz="914400" rtl="0" eaLnBrk="1" latinLnBrk="1" hangingPunct="1">
-              <a:defRPr sz="1800" kern="1200">
-                <a:solidFill>
-                  <a:schemeClr val="lt1"/>
-                </a:solidFill>
-                <a:latin typeface="+mn-lt"/>
-                <a:ea typeface="+mn-ea"/>
-                <a:cs typeface="+mn-cs"/>
-              </a:defRPr>
-            </a:lvl7pPr>
-            <a:lvl8pPr marL="3200400" algn="l" defTabSz="914400" rtl="0" eaLnBrk="1" latinLnBrk="1" hangingPunct="1">
-              <a:defRPr sz="1800" kern="1200">
-                <a:solidFill>
-                  <a:schemeClr val="lt1"/>
-                </a:solidFill>
-                <a:latin typeface="+mn-lt"/>
-                <a:ea typeface="+mn-ea"/>
-                <a:cs typeface="+mn-cs"/>
-              </a:defRPr>
-            </a:lvl8pPr>
-            <a:lvl9pPr marL="3657600" algn="l" defTabSz="914400" rtl="0" eaLnBrk="1" latinLnBrk="1" hangingPunct="1">
-              <a:defRPr sz="1800" kern="1200">
-                <a:solidFill>
-                  <a:schemeClr val="lt1"/>
-                </a:solidFill>
-                <a:latin typeface="+mn-lt"/>
-                <a:ea typeface="+mn-ea"/>
-                <a:cs typeface="+mn-cs"/>
-              </a:defRPr>
-            </a:lvl9pPr>
-          </a:lstStyle>
-          <a:p>
-            <a:pPr algn="ctr"/>
-            <a:endParaRPr lang="ko-KR" altLang="en-US" dirty="0">
-              <a:solidFill>
-                <a:schemeClr val="tx1"/>
-              </a:solidFill>
-            </a:endParaRPr>
-          </a:p>
-        </p:txBody>
-      </p:sp>
-      <p:sp>
-        <p:nvSpPr>
-          <p:cNvPr id="89" name="Rectangle 130">
-            <a:extLst>
-              <a:ext uri="{FF2B5EF4-FFF2-40B4-BE49-F238E27FC236}">
-                <a16:creationId xmlns:a16="http://schemas.microsoft.com/office/drawing/2014/main" id="{E9F6910D-08B2-448E-9CBD-AF3616A1DD34}"/>
-              </a:ext>
-            </a:extLst>
-          </p:cNvPr>
-          <p:cNvSpPr/>
-          <p:nvPr/>
-        </p:nvSpPr>
-        <p:spPr>
-          <a:xfrm>
-            <a:off x="7986107" y="3713707"/>
-            <a:ext cx="379301" cy="381023"/>
-          </a:xfrm>
-          <a:custGeom>
-            <a:avLst/>
-            <a:gdLst/>
-            <a:ahLst/>
-            <a:cxnLst/>
-            <a:rect l="l" t="t" r="r" b="b"/>
-            <a:pathLst>
-              <a:path w="371900" h="373588">
-                <a:moveTo>
-                  <a:pt x="297080" y="129105"/>
-                </a:moveTo>
-                <a:lnTo>
-                  <a:pt x="284273" y="219737"/>
-                </a:lnTo>
-                <a:lnTo>
-                  <a:pt x="305496" y="219737"/>
-                </a:lnTo>
-                <a:lnTo>
-                  <a:pt x="333001" y="129105"/>
-                </a:lnTo>
-                <a:close/>
-                <a:moveTo>
-                  <a:pt x="228265" y="129105"/>
-                </a:moveTo>
-                <a:lnTo>
-                  <a:pt x="228265" y="219737"/>
-                </a:lnTo>
-                <a:lnTo>
-                  <a:pt x="250807" y="219737"/>
-                </a:lnTo>
-                <a:lnTo>
-                  <a:pt x="263614" y="129105"/>
-                </a:lnTo>
-                <a:close/>
-                <a:moveTo>
-                  <a:pt x="157021" y="129105"/>
-                </a:moveTo>
-                <a:lnTo>
-                  <a:pt x="175826" y="219737"/>
-                </a:lnTo>
-                <a:lnTo>
-                  <a:pt x="195129" y="219737"/>
-                </a:lnTo>
-                <a:lnTo>
-                  <a:pt x="195129" y="129105"/>
-                </a:lnTo>
-                <a:close/>
-                <a:moveTo>
-                  <a:pt x="93087" y="129105"/>
-                </a:moveTo>
-                <a:lnTo>
-                  <a:pt x="117372" y="219737"/>
-                </a:lnTo>
-                <a:lnTo>
-                  <a:pt x="141984" y="219737"/>
-                </a:lnTo>
-                <a:lnTo>
-                  <a:pt x="123179" y="129105"/>
-                </a:lnTo>
-                <a:close/>
-                <a:moveTo>
-                  <a:pt x="58494" y="0"/>
-                </a:moveTo>
-                <a:lnTo>
-                  <a:pt x="84208" y="95969"/>
-                </a:lnTo>
-                <a:lnTo>
-                  <a:pt x="354346" y="95969"/>
-                </a:lnTo>
-                <a:lnTo>
-                  <a:pt x="354346" y="97437"/>
-                </a:lnTo>
-                <a:cubicBezTo>
-                  <a:pt x="356087" y="96136"/>
-                  <a:pt x="357928" y="96353"/>
-                  <a:pt x="359747" y="96905"/>
-                </a:cubicBezTo>
-                <a:lnTo>
-                  <a:pt x="360371" y="97095"/>
-                </a:lnTo>
-                <a:cubicBezTo>
-                  <a:pt x="368954" y="99700"/>
-                  <a:pt x="373801" y="108770"/>
-                  <a:pt x="371196" y="117354"/>
-                </a:cubicBezTo>
-                <a:lnTo>
-                  <a:pt x="333339" y="242097"/>
-                </a:lnTo>
-                <a:cubicBezTo>
-                  <a:pt x="331591" y="247858"/>
-                  <a:pt x="326929" y="251935"/>
-                  <a:pt x="321206" y="252122"/>
-                </a:cubicBezTo>
-                <a:lnTo>
-                  <a:pt x="321206" y="252873"/>
-                </a:lnTo>
-                <a:lnTo>
-                  <a:pt x="313576" y="252873"/>
-                </a:lnTo>
-                <a:cubicBezTo>
-                  <a:pt x="313378" y="253010"/>
-                  <a:pt x="313229" y="252967"/>
-                  <a:pt x="313080" y="252922"/>
-                </a:cubicBezTo>
-                <a:lnTo>
-                  <a:pt x="312919" y="252873"/>
-                </a:lnTo>
-                <a:lnTo>
-                  <a:pt x="126251" y="252873"/>
-                </a:lnTo>
-                <a:lnTo>
-                  <a:pt x="133971" y="281687"/>
-                </a:lnTo>
-                <a:lnTo>
-                  <a:pt x="321075" y="281687"/>
-                </a:lnTo>
-                <a:lnTo>
-                  <a:pt x="321075" y="314823"/>
-                </a:lnTo>
-                <a:lnTo>
-                  <a:pt x="318480" y="314823"/>
-                </a:lnTo>
-                <a:cubicBezTo>
-                  <a:pt x="329614" y="318311"/>
-                  <a:pt x="336414" y="328969"/>
-                  <a:pt x="336414" y="341215"/>
-                </a:cubicBezTo>
-                <a:cubicBezTo>
-                  <a:pt x="336414" y="359094"/>
-                  <a:pt x="321920" y="373588"/>
-                  <a:pt x="304041" y="373588"/>
-                </a:cubicBezTo>
-                <a:cubicBezTo>
-                  <a:pt x="286162" y="373588"/>
-                  <a:pt x="271668" y="359094"/>
-                  <a:pt x="271668" y="341215"/>
-                </a:cubicBezTo>
-                <a:cubicBezTo>
-                  <a:pt x="271668" y="328969"/>
-                  <a:pt x="278468" y="318311"/>
-                  <a:pt x="289602" y="314823"/>
-                </a:cubicBezTo>
-                <a:lnTo>
-                  <a:pt x="142850" y="314823"/>
-                </a:lnTo>
-                <a:lnTo>
-                  <a:pt x="143397" y="316865"/>
-                </a:lnTo>
-                <a:cubicBezTo>
-                  <a:pt x="151629" y="321811"/>
-                  <a:pt x="156401" y="330956"/>
-                  <a:pt x="156401" y="341215"/>
-                </a:cubicBezTo>
-                <a:cubicBezTo>
-                  <a:pt x="156401" y="359094"/>
-                  <a:pt x="141907" y="373588"/>
-                  <a:pt x="124028" y="373588"/>
-                </a:cubicBezTo>
-                <a:cubicBezTo>
-                  <a:pt x="106149" y="373588"/>
-                  <a:pt x="91655" y="359094"/>
-                  <a:pt x="91655" y="341215"/>
-                </a:cubicBezTo>
-                <a:cubicBezTo>
-                  <a:pt x="91655" y="329356"/>
-                  <a:pt x="98032" y="318986"/>
-                  <a:pt x="108649" y="315212"/>
-                </a:cubicBezTo>
-                <a:lnTo>
-                  <a:pt x="33542" y="34909"/>
-                </a:lnTo>
-                <a:lnTo>
-                  <a:pt x="0" y="34909"/>
-                </a:lnTo>
-                <a:lnTo>
-                  <a:pt x="0" y="1773"/>
-                </a:lnTo>
-                <a:lnTo>
-                  <a:pt x="51879" y="1773"/>
-                </a:lnTo>
-                <a:close/>
-              </a:path>
-            </a:pathLst>
-          </a:custGeom>
-          <a:solidFill>
-            <a:schemeClr val="bg1"/>
-          </a:solidFill>
-          <a:ln>
-            <a:noFill/>
-          </a:ln>
-        </p:spPr>
-        <p:style>
-          <a:lnRef idx="2">
-            <a:schemeClr val="accent1">
-              <a:shade val="50000"/>
-            </a:schemeClr>
-          </a:lnRef>
-          <a:fillRef idx="1">
-            <a:schemeClr val="accent1"/>
-          </a:fillRef>
-          <a:effectRef idx="0">
-            <a:schemeClr val="accent1"/>
-          </a:effectRef>
-          <a:fontRef idx="minor">
-            <a:schemeClr val="lt1"/>
-          </a:fontRef>
-        </p:style>
-        <p:txBody>
-          <a:bodyPr rtlCol="0" anchor="ctr"/>
-          <a:lstStyle>
-            <a:defPPr>
-              <a:defRPr lang="ko-KR"/>
-            </a:defPPr>
-            <a:lvl1pPr marL="0" algn="l" defTabSz="914400" rtl="0" eaLnBrk="1" latinLnBrk="1" hangingPunct="1">
-              <a:defRPr sz="1800" kern="1200">
-                <a:solidFill>
-                  <a:schemeClr val="lt1"/>
-                </a:solidFill>
-                <a:latin typeface="+mn-lt"/>
-                <a:ea typeface="+mn-ea"/>
-                <a:cs typeface="+mn-cs"/>
-              </a:defRPr>
-            </a:lvl1pPr>
-            <a:lvl2pPr marL="457200" algn="l" defTabSz="914400" rtl="0" eaLnBrk="1" latinLnBrk="1" hangingPunct="1">
-              <a:defRPr sz="1800" kern="1200">
-                <a:solidFill>
-                  <a:schemeClr val="lt1"/>
-                </a:solidFill>
-                <a:latin typeface="+mn-lt"/>
-                <a:ea typeface="+mn-ea"/>
-                <a:cs typeface="+mn-cs"/>
-              </a:defRPr>
-            </a:lvl2pPr>
-            <a:lvl3pPr marL="914400" algn="l" defTabSz="914400" rtl="0" eaLnBrk="1" latinLnBrk="1" hangingPunct="1">
-              <a:defRPr sz="1800" kern="1200">
-                <a:solidFill>
-                  <a:schemeClr val="lt1"/>
-                </a:solidFill>
-                <a:latin typeface="+mn-lt"/>
-                <a:ea typeface="+mn-ea"/>
-                <a:cs typeface="+mn-cs"/>
-              </a:defRPr>
-            </a:lvl3pPr>
-            <a:lvl4pPr marL="1371600" algn="l" defTabSz="914400" rtl="0" eaLnBrk="1" latinLnBrk="1" hangingPunct="1">
-              <a:defRPr sz="1800" kern="1200">
-                <a:solidFill>
-                  <a:schemeClr val="lt1"/>
-                </a:solidFill>
-                <a:latin typeface="+mn-lt"/>
-                <a:ea typeface="+mn-ea"/>
-                <a:cs typeface="+mn-cs"/>
-              </a:defRPr>
-            </a:lvl4pPr>
-            <a:lvl5pPr marL="1828800" algn="l" defTabSz="914400" rtl="0" eaLnBrk="1" latinLnBrk="1" hangingPunct="1">
-              <a:defRPr sz="1800" kern="1200">
-                <a:solidFill>
-                  <a:schemeClr val="lt1"/>
-                </a:solidFill>
-                <a:latin typeface="+mn-lt"/>
-                <a:ea typeface="+mn-ea"/>
-                <a:cs typeface="+mn-cs"/>
-              </a:defRPr>
-            </a:lvl5pPr>
-            <a:lvl6pPr marL="2286000" algn="l" defTabSz="914400" rtl="0" eaLnBrk="1" latinLnBrk="1" hangingPunct="1">
-              <a:defRPr sz="1800" kern="1200">
-                <a:solidFill>
-                  <a:schemeClr val="lt1"/>
-                </a:solidFill>
-                <a:latin typeface="+mn-lt"/>
-                <a:ea typeface="+mn-ea"/>
-                <a:cs typeface="+mn-cs"/>
-              </a:defRPr>
-            </a:lvl6pPr>
-            <a:lvl7pPr marL="2743200" algn="l" defTabSz="914400" rtl="0" eaLnBrk="1" latinLnBrk="1" hangingPunct="1">
-              <a:defRPr sz="1800" kern="1200">
-                <a:solidFill>
-                  <a:schemeClr val="lt1"/>
-                </a:solidFill>
-                <a:latin typeface="+mn-lt"/>
-                <a:ea typeface="+mn-ea"/>
-                <a:cs typeface="+mn-cs"/>
-              </a:defRPr>
-            </a:lvl7pPr>
-            <a:lvl8pPr marL="3200400" algn="l" defTabSz="914400" rtl="0" eaLnBrk="1" latinLnBrk="1" hangingPunct="1">
-              <a:defRPr sz="1800" kern="1200">
-                <a:solidFill>
-                  <a:schemeClr val="lt1"/>
-                </a:solidFill>
-                <a:latin typeface="+mn-lt"/>
-                <a:ea typeface="+mn-ea"/>
-                <a:cs typeface="+mn-cs"/>
-              </a:defRPr>
-            </a:lvl8pPr>
-            <a:lvl9pPr marL="3657600" algn="l" defTabSz="914400" rtl="0" eaLnBrk="1" latinLnBrk="1" hangingPunct="1">
-              <a:defRPr sz="1800" kern="1200">
-                <a:solidFill>
-                  <a:schemeClr val="lt1"/>
-                </a:solidFill>
-                <a:latin typeface="+mn-lt"/>
-                <a:ea typeface="+mn-ea"/>
-                <a:cs typeface="+mn-cs"/>
-              </a:defRPr>
-            </a:lvl9pPr>
-          </a:lstStyle>
-          <a:p>
-            <a:pPr algn="ctr"/>
-            <a:endParaRPr lang="ko-KR" altLang="en-US" dirty="0">
-              <a:solidFill>
-                <a:schemeClr val="tx1"/>
-              </a:solidFill>
-            </a:endParaRPr>
-          </a:p>
-        </p:txBody>
-      </p:sp>
-      <p:sp>
-        <p:nvSpPr>
-          <p:cNvPr id="8" name="Text Placeholder 1">
-            <a:extLst>
-              <a:ext uri="{FF2B5EF4-FFF2-40B4-BE49-F238E27FC236}">
-                <a16:creationId xmlns:a16="http://schemas.microsoft.com/office/drawing/2014/main" id="{DE215665-D737-49D2-BE72-4AB6528C4855}"/>
-              </a:ext>
-            </a:extLst>
-          </p:cNvPr>
-          <p:cNvSpPr>
-            <a:spLocks noGrp="1"/>
-          </p:cNvSpPr>
-          <p:nvPr>
-            <p:ph type="body" sz="quarter" idx="10"/>
-          </p:nvPr>
-        </p:nvSpPr>
-        <p:spPr>
-          <a:xfrm>
-            <a:off x="309402" y="356008"/>
-            <a:ext cx="3315542" cy="724247"/>
-          </a:xfrm>
-        </p:spPr>
-        <p:txBody>
-          <a:bodyPr>
-            <a:normAutofit fontScale="92500" lnSpcReduction="10000"/>
-          </a:bodyPr>
-          <a:lstStyle/>
-          <a:p>
-            <a:pPr algn="l" eaLnBrk="1" hangingPunct="1"/>
-            <a:r>
-              <a:rPr lang="en-US" altLang="zh-CN" sz="5400" dirty="0">
-                <a:solidFill>
-                  <a:schemeClr val="accent3"/>
-                </a:solidFill>
-                <a:latin typeface="Calibri" panose="020F0502020204030204" pitchFamily="34" charset="0"/>
-              </a:rPr>
-              <a:t>Sharding</a:t>
-            </a:r>
-            <a:endParaRPr lang="zh-CN" altLang="zh-CN" sz="5400" dirty="0">
-              <a:solidFill>
-                <a:schemeClr val="accent3"/>
-              </a:solidFill>
-              <a:latin typeface="Calibri" panose="020F0502020204030204" pitchFamily="34" charset="0"/>
-            </a:endParaRPr>
-          </a:p>
-        </p:txBody>
-      </p:sp>
-      <p:sp>
-        <p:nvSpPr>
-          <p:cNvPr id="9" name="Tartalom helye 2">
-            <a:extLst>
-              <a:ext uri="{FF2B5EF4-FFF2-40B4-BE49-F238E27FC236}">
-                <a16:creationId xmlns:a16="http://schemas.microsoft.com/office/drawing/2014/main" id="{2F1C6C22-045E-40E1-90CB-130576644F0F}"/>
-              </a:ext>
-            </a:extLst>
-          </p:cNvPr>
-          <p:cNvSpPr txBox="1">
-            <a:spLocks/>
-          </p:cNvSpPr>
-          <p:nvPr/>
-        </p:nvSpPr>
-        <p:spPr>
-          <a:xfrm>
-            <a:off x="86076" y="1841777"/>
-            <a:ext cx="5506072" cy="4207421"/>
-          </a:xfrm>
-          <a:prstGeom prst="rect">
-            <a:avLst/>
-          </a:prstGeom>
-        </p:spPr>
-        <p:txBody>
-          <a:bodyPr/>
-          <a:lstStyle>
-            <a:lvl1pPr marL="228600" indent="-228600" algn="l" defTabSz="914400" rtl="0" eaLnBrk="1" latinLnBrk="0" hangingPunct="1">
-              <a:lnSpc>
-                <a:spcPct val="90000"/>
-              </a:lnSpc>
-              <a:spcBef>
-                <a:spcPts val="1000"/>
-              </a:spcBef>
-              <a:buFont typeface="Arial" panose="020B0604020202020204" pitchFamily="34" charset="0"/>
-              <a:buChar char="•"/>
-              <a:defRPr sz="2800" kern="1200">
-                <a:solidFill>
-                  <a:schemeClr val="tx1"/>
-                </a:solidFill>
-                <a:latin typeface="+mn-lt"/>
-                <a:ea typeface="+mn-ea"/>
-                <a:cs typeface="+mn-cs"/>
-              </a:defRPr>
-            </a:lvl1pPr>
-            <a:lvl2pPr marL="685800" indent="-228600" algn="l" defTabSz="914400" rtl="0" eaLnBrk="1" latinLnBrk="0" hangingPunct="1">
-              <a:lnSpc>
-                <a:spcPct val="90000"/>
-              </a:lnSpc>
-              <a:spcBef>
-                <a:spcPts val="500"/>
-              </a:spcBef>
-              <a:buFont typeface="Arial" panose="020B0604020202020204" pitchFamily="34" charset="0"/>
-              <a:buChar char="•"/>
-              <a:defRPr sz="2400" kern="1200">
-                <a:solidFill>
-                  <a:schemeClr val="tx1"/>
-                </a:solidFill>
-                <a:latin typeface="+mn-lt"/>
-                <a:ea typeface="+mn-ea"/>
-                <a:cs typeface="+mn-cs"/>
-              </a:defRPr>
-            </a:lvl2pPr>
-            <a:lvl3pPr marL="1143000" indent="-228600" algn="l" defTabSz="914400" rtl="0" eaLnBrk="1" latinLnBrk="0" hangingPunct="1">
-              <a:lnSpc>
-                <a:spcPct val="90000"/>
-              </a:lnSpc>
-              <a:spcBef>
-                <a:spcPts val="500"/>
-              </a:spcBef>
-              <a:buFont typeface="Arial" panose="020B0604020202020204" pitchFamily="34" charset="0"/>
-              <a:buChar char="•"/>
-              <a:defRPr sz="2000" kern="1200">
-                <a:solidFill>
-                  <a:schemeClr val="tx1"/>
-                </a:solidFill>
-                <a:latin typeface="+mn-lt"/>
-                <a:ea typeface="+mn-ea"/>
-                <a:cs typeface="+mn-cs"/>
-              </a:defRPr>
-            </a:lvl3pPr>
-            <a:lvl4pPr marL="1600200" indent="-228600" algn="l" defTabSz="914400" rtl="0" eaLnBrk="1" latinLnBrk="0" hangingPunct="1">
-              <a:lnSpc>
-                <a:spcPct val="90000"/>
-              </a:lnSpc>
-              <a:spcBef>
-                <a:spcPts val="500"/>
-              </a:spcBef>
-              <a:buFont typeface="Arial" panose="020B0604020202020204" pitchFamily="34" charset="0"/>
-              <a:buChar char="•"/>
-              <a:defRPr sz="1800" kern="1200">
-                <a:solidFill>
-                  <a:schemeClr val="tx1"/>
-                </a:solidFill>
-                <a:latin typeface="+mn-lt"/>
-                <a:ea typeface="+mn-ea"/>
-                <a:cs typeface="+mn-cs"/>
-              </a:defRPr>
-            </a:lvl4pPr>
-            <a:lvl5pPr marL="2057400" indent="-228600" algn="l" defTabSz="914400" rtl="0" eaLnBrk="1" latinLnBrk="0" hangingPunct="1">
-              <a:lnSpc>
-                <a:spcPct val="90000"/>
-              </a:lnSpc>
-              <a:spcBef>
-                <a:spcPts val="500"/>
-              </a:spcBef>
-              <a:buFont typeface="Arial" panose="020B0604020202020204" pitchFamily="34" charset="0"/>
-              <a:buChar char="•"/>
-              <a:defRPr sz="1800" kern="1200">
-                <a:solidFill>
-                  <a:schemeClr val="tx1"/>
-                </a:solidFill>
-                <a:latin typeface="+mn-lt"/>
-                <a:ea typeface="+mn-ea"/>
-                <a:cs typeface="+mn-cs"/>
-              </a:defRPr>
-            </a:lvl5pPr>
-            <a:lvl6pPr marL="2514600" indent="-228600" algn="l" defTabSz="914400" rtl="0" eaLnBrk="1" latinLnBrk="0" hangingPunct="1">
-              <a:lnSpc>
-                <a:spcPct val="90000"/>
-              </a:lnSpc>
-              <a:spcBef>
-                <a:spcPts val="500"/>
-              </a:spcBef>
-              <a:buFont typeface="Arial" panose="020B0604020202020204" pitchFamily="34" charset="0"/>
-              <a:buChar char="•"/>
-              <a:defRPr sz="1800" kern="1200">
-                <a:solidFill>
-                  <a:schemeClr val="tx1"/>
-                </a:solidFill>
-                <a:latin typeface="+mn-lt"/>
-                <a:ea typeface="+mn-ea"/>
-                <a:cs typeface="+mn-cs"/>
-              </a:defRPr>
-            </a:lvl6pPr>
-            <a:lvl7pPr marL="2971800" indent="-228600" algn="l" defTabSz="914400" rtl="0" eaLnBrk="1" latinLnBrk="0" hangingPunct="1">
-              <a:lnSpc>
-                <a:spcPct val="90000"/>
-              </a:lnSpc>
-              <a:spcBef>
-                <a:spcPts val="500"/>
-              </a:spcBef>
-              <a:buFont typeface="Arial" panose="020B0604020202020204" pitchFamily="34" charset="0"/>
-              <a:buChar char="•"/>
-              <a:defRPr sz="1800" kern="1200">
-                <a:solidFill>
-                  <a:schemeClr val="tx1"/>
-                </a:solidFill>
-                <a:latin typeface="+mn-lt"/>
-                <a:ea typeface="+mn-ea"/>
-                <a:cs typeface="+mn-cs"/>
-              </a:defRPr>
-            </a:lvl7pPr>
-            <a:lvl8pPr marL="3429000" indent="-228600" algn="l" defTabSz="914400" rtl="0" eaLnBrk="1" latinLnBrk="0" hangingPunct="1">
-              <a:lnSpc>
-                <a:spcPct val="90000"/>
-              </a:lnSpc>
-              <a:spcBef>
-                <a:spcPts val="500"/>
-              </a:spcBef>
-              <a:buFont typeface="Arial" panose="020B0604020202020204" pitchFamily="34" charset="0"/>
-              <a:buChar char="•"/>
-              <a:defRPr sz="1800" kern="1200">
-                <a:solidFill>
-                  <a:schemeClr val="tx1"/>
-                </a:solidFill>
-                <a:latin typeface="+mn-lt"/>
-                <a:ea typeface="+mn-ea"/>
-                <a:cs typeface="+mn-cs"/>
-              </a:defRPr>
-            </a:lvl8pPr>
-            <a:lvl9pPr marL="3886200" indent="-228600" algn="l" defTabSz="914400" rtl="0" eaLnBrk="1" latinLnBrk="0" hangingPunct="1">
-              <a:lnSpc>
-                <a:spcPct val="90000"/>
-              </a:lnSpc>
-              <a:spcBef>
-                <a:spcPts val="500"/>
-              </a:spcBef>
-              <a:buFont typeface="Arial" panose="020B0604020202020204" pitchFamily="34" charset="0"/>
-              <a:buChar char="•"/>
-              <a:defRPr sz="1800" kern="1200">
-                <a:solidFill>
-                  <a:schemeClr val="tx1"/>
-                </a:solidFill>
-                <a:latin typeface="+mn-lt"/>
-                <a:ea typeface="+mn-ea"/>
-                <a:cs typeface="+mn-cs"/>
-              </a:defRPr>
-            </a:lvl9pPr>
-          </a:lstStyle>
-          <a:p>
-            <a:pPr>
-              <a:defRPr/>
-            </a:pPr>
-            <a:r>
-              <a:rPr lang="en-US" dirty="0"/>
-              <a:t>Sharding is a method for distributing data across multiple machines. </a:t>
-            </a:r>
-          </a:p>
-          <a:p>
-            <a:pPr>
-              <a:defRPr/>
-            </a:pPr>
-            <a:r>
-              <a:rPr lang="en-US" dirty="0"/>
-              <a:t>MongoDB uses </a:t>
-            </a:r>
-            <a:r>
-              <a:rPr lang="en-US" dirty="0" err="1"/>
-              <a:t>sharding</a:t>
-            </a:r>
-            <a:r>
-              <a:rPr lang="en-US" dirty="0"/>
-              <a:t> to support deployments with very large data sets and </a:t>
-            </a:r>
-            <a:r>
-              <a:rPr lang="en-US" b="1" dirty="0"/>
-              <a:t>high throughput operations.</a:t>
-            </a:r>
-            <a:endParaRPr lang="hu-HU" b="1" dirty="0"/>
-          </a:p>
-        </p:txBody>
-      </p:sp>
-      <p:pic>
-        <p:nvPicPr>
-          <p:cNvPr id="11" name="Picture 10">
-            <a:extLst>
-              <a:ext uri="{FF2B5EF4-FFF2-40B4-BE49-F238E27FC236}">
-                <a16:creationId xmlns:a16="http://schemas.microsoft.com/office/drawing/2014/main" id="{C21D4A4E-046A-46EC-B25E-D03847DD6BA1}"/>
-              </a:ext>
-            </a:extLst>
-          </p:cNvPr>
-          <p:cNvPicPr>
-            <a:picLocks noChangeAspect="1"/>
-          </p:cNvPicPr>
-          <p:nvPr/>
-        </p:nvPicPr>
-        <p:blipFill>
-          <a:blip r:embed="rId2"/>
-          <a:stretch>
-            <a:fillRect/>
-          </a:stretch>
-        </p:blipFill>
-        <p:spPr>
-          <a:xfrm>
-            <a:off x="6096000" y="1717776"/>
-            <a:ext cx="4145035" cy="4249274"/>
-          </a:xfrm>
-          <a:prstGeom prst="rect">
-            <a:avLst/>
-          </a:prstGeom>
-        </p:spPr>
-      </p:pic>
-    </p:spTree>
-    <p:extLst>
-      <p:ext uri="{BB962C8B-B14F-4D97-AF65-F5344CB8AC3E}">
-        <p14:creationId xmlns:p14="http://schemas.microsoft.com/office/powerpoint/2010/main" val="525928724"/>
       </p:ext>
     </p:extLst>
   </p:cSld>

--- a/MongoDB.pptx
+++ b/MongoDB.pptx
@@ -17,10 +17,12 @@
     <p:sldId id="369" r:id="rId11"/>
     <p:sldId id="370" r:id="rId12"/>
     <p:sldId id="371" r:id="rId13"/>
-    <p:sldId id="375" r:id="rId14"/>
-    <p:sldId id="374" r:id="rId15"/>
-    <p:sldId id="373" r:id="rId16"/>
-    <p:sldId id="270" r:id="rId17"/>
+    <p:sldId id="377" r:id="rId14"/>
+    <p:sldId id="378" r:id="rId15"/>
+    <p:sldId id="375" r:id="rId16"/>
+    <p:sldId id="374" r:id="rId17"/>
+    <p:sldId id="373" r:id="rId18"/>
+    <p:sldId id="270" r:id="rId19"/>
   </p:sldIdLst>
   <p:sldSz cx="12192000" cy="6858000"/>
   <p:notesSz cx="6858000" cy="9144000"/>
@@ -276,7 +278,7 @@
           <a:p>
             <a:fld id="{B66E714E-885D-4D12-977C-C047A2AC8E1D}" type="datetimeFigureOut">
               <a:rPr lang="en-IN" smtClean="0"/>
-              <a:t>29-03-2025</a:t>
+              <a:t>05-05-2025</a:t>
             </a:fld>
             <a:endParaRPr lang="en-IN"/>
           </a:p>
@@ -476,7 +478,7 @@
           <a:p>
             <a:fld id="{B66E714E-885D-4D12-977C-C047A2AC8E1D}" type="datetimeFigureOut">
               <a:rPr lang="en-IN" smtClean="0"/>
-              <a:t>29-03-2025</a:t>
+              <a:t>05-05-2025</a:t>
             </a:fld>
             <a:endParaRPr lang="en-IN"/>
           </a:p>
@@ -686,7 +688,7 @@
           <a:p>
             <a:fld id="{B66E714E-885D-4D12-977C-C047A2AC8E1D}" type="datetimeFigureOut">
               <a:rPr lang="en-IN" smtClean="0"/>
-              <a:t>29-03-2025</a:t>
+              <a:t>05-05-2025</a:t>
             </a:fld>
             <a:endParaRPr lang="en-IN"/>
           </a:p>
@@ -967,7 +969,7 @@
           <a:p>
             <a:fld id="{B66E714E-885D-4D12-977C-C047A2AC8E1D}" type="datetimeFigureOut">
               <a:rPr lang="en-IN" smtClean="0"/>
-              <a:t>29-03-2025</a:t>
+              <a:t>05-05-2025</a:t>
             </a:fld>
             <a:endParaRPr lang="en-IN"/>
           </a:p>
@@ -1243,7 +1245,7 @@
           <a:p>
             <a:fld id="{B66E714E-885D-4D12-977C-C047A2AC8E1D}" type="datetimeFigureOut">
               <a:rPr lang="en-IN" smtClean="0"/>
-              <a:t>29-03-2025</a:t>
+              <a:t>05-05-2025</a:t>
             </a:fld>
             <a:endParaRPr lang="en-IN"/>
           </a:p>
@@ -1511,7 +1513,7 @@
           <a:p>
             <a:fld id="{B66E714E-885D-4D12-977C-C047A2AC8E1D}" type="datetimeFigureOut">
               <a:rPr lang="en-IN" smtClean="0"/>
-              <a:t>29-03-2025</a:t>
+              <a:t>05-05-2025</a:t>
             </a:fld>
             <a:endParaRPr lang="en-IN"/>
           </a:p>
@@ -1926,7 +1928,7 @@
           <a:p>
             <a:fld id="{B66E714E-885D-4D12-977C-C047A2AC8E1D}" type="datetimeFigureOut">
               <a:rPr lang="en-IN" smtClean="0"/>
-              <a:t>29-03-2025</a:t>
+              <a:t>05-05-2025</a:t>
             </a:fld>
             <a:endParaRPr lang="en-IN"/>
           </a:p>
@@ -2068,7 +2070,7 @@
           <a:p>
             <a:fld id="{B66E714E-885D-4D12-977C-C047A2AC8E1D}" type="datetimeFigureOut">
               <a:rPr lang="en-IN" smtClean="0"/>
-              <a:t>29-03-2025</a:t>
+              <a:t>05-05-2025</a:t>
             </a:fld>
             <a:endParaRPr lang="en-IN"/>
           </a:p>
@@ -2181,7 +2183,7 @@
           <a:p>
             <a:fld id="{B66E714E-885D-4D12-977C-C047A2AC8E1D}" type="datetimeFigureOut">
               <a:rPr lang="en-IN" smtClean="0"/>
-              <a:t>29-03-2025</a:t>
+              <a:t>05-05-2025</a:t>
             </a:fld>
             <a:endParaRPr lang="en-IN"/>
           </a:p>
@@ -2494,7 +2496,7 @@
           <a:p>
             <a:fld id="{B66E714E-885D-4D12-977C-C047A2AC8E1D}" type="datetimeFigureOut">
               <a:rPr lang="en-IN" smtClean="0"/>
-              <a:t>29-03-2025</a:t>
+              <a:t>05-05-2025</a:t>
             </a:fld>
             <a:endParaRPr lang="en-IN"/>
           </a:p>
@@ -2783,7 +2785,7 @@
           <a:p>
             <a:fld id="{B66E714E-885D-4D12-977C-C047A2AC8E1D}" type="datetimeFigureOut">
               <a:rPr lang="en-IN" smtClean="0"/>
-              <a:t>29-03-2025</a:t>
+              <a:t>05-05-2025</a:t>
             </a:fld>
             <a:endParaRPr lang="en-IN"/>
           </a:p>
@@ -3026,7 +3028,7 @@
           <a:p>
             <a:fld id="{B66E714E-885D-4D12-977C-C047A2AC8E1D}" type="datetimeFigureOut">
               <a:rPr lang="en-IN" smtClean="0"/>
-              <a:t>29-03-2025</a:t>
+              <a:t>05-05-2025</a:t>
             </a:fld>
             <a:endParaRPr lang="en-IN"/>
           </a:p>
@@ -7463,6 +7465,689 @@
           <p:cNvPr id="2" name="Title 1">
             <a:extLst>
               <a:ext uri="{FF2B5EF4-FFF2-40B4-BE49-F238E27FC236}">
+                <a16:creationId xmlns:a16="http://schemas.microsoft.com/office/drawing/2014/main" id="{D16DA351-0E34-33F2-B46B-DF3DA1B59804}"/>
+              </a:ext>
+            </a:extLst>
+          </p:cNvPr>
+          <p:cNvSpPr>
+            <a:spLocks noGrp="1"/>
+          </p:cNvSpPr>
+          <p:nvPr>
+            <p:ph type="title"/>
+          </p:nvPr>
+        </p:nvSpPr>
+        <p:spPr>
+          <a:xfrm>
+            <a:off x="838200" y="365125"/>
+            <a:ext cx="10515600" cy="385989"/>
+          </a:xfrm>
+        </p:spPr>
+        <p:txBody>
+          <a:bodyPr>
+            <a:normAutofit fontScale="90000"/>
+          </a:bodyPr>
+          <a:lstStyle/>
+          <a:p>
+            <a:r>
+              <a:rPr lang="en-IN" dirty="0"/>
+              <a:t>Aggregation in MongoDB</a:t>
+            </a:r>
+          </a:p>
+        </p:txBody>
+      </p:sp>
+      <p:sp>
+        <p:nvSpPr>
+          <p:cNvPr id="4" name="TextBox 3">
+            <a:extLst>
+              <a:ext uri="{FF2B5EF4-FFF2-40B4-BE49-F238E27FC236}">
+                <a16:creationId xmlns:a16="http://schemas.microsoft.com/office/drawing/2014/main" id="{28CCABF1-D719-61B9-056D-873F9FD44AF9}"/>
+              </a:ext>
+            </a:extLst>
+          </p:cNvPr>
+          <p:cNvSpPr txBox="1"/>
+          <p:nvPr/>
+        </p:nvSpPr>
+        <p:spPr>
+          <a:xfrm>
+            <a:off x="696685" y="1076351"/>
+            <a:ext cx="8305800" cy="3554819"/>
+          </a:xfrm>
+          <a:prstGeom prst="rect">
+            <a:avLst/>
+          </a:prstGeom>
+          <a:noFill/>
+        </p:spPr>
+        <p:txBody>
+          <a:bodyPr wrap="square">
+            <a:spAutoFit/>
+          </a:bodyPr>
+          <a:lstStyle/>
+          <a:p>
+            <a:pPr algn="l" fontAlgn="base">
+              <a:spcAft>
+                <a:spcPts val="1800"/>
+              </a:spcAft>
+              <a:buFont typeface="Arial" panose="020B0604020202020204" pitchFamily="34" charset="0"/>
+              <a:buChar char="•"/>
+            </a:pPr>
+            <a:r>
+              <a:rPr lang="en-US" b="0" i="0" dirty="0">
+                <a:effectLst/>
+                <a:latin typeface="Nunito" pitchFamily="2" charset="0"/>
+              </a:rPr>
+              <a:t>The Aggregation Framework in MongoDB is a powerful tool for performing data processing and transformation on documents within a collection.</a:t>
+            </a:r>
+            <a:br>
+              <a:rPr lang="en-US" b="0" i="0" dirty="0">
+                <a:effectLst/>
+                <a:latin typeface="Nunito" pitchFamily="2" charset="0"/>
+              </a:rPr>
+            </a:br>
+            <a:endParaRPr lang="en-US" b="0" i="0" dirty="0">
+              <a:effectLst/>
+              <a:latin typeface="Nunito" pitchFamily="2" charset="0"/>
+            </a:endParaRPr>
+          </a:p>
+          <a:p>
+            <a:pPr algn="l" fontAlgn="base">
+              <a:spcAft>
+                <a:spcPts val="1800"/>
+              </a:spcAft>
+              <a:buFont typeface="Arial" panose="020B0604020202020204" pitchFamily="34" charset="0"/>
+              <a:buChar char="•"/>
+            </a:pPr>
+            <a:r>
+              <a:rPr lang="en-US" b="0" i="0" dirty="0">
+                <a:effectLst/>
+                <a:latin typeface="Nunito" pitchFamily="2" charset="0"/>
+              </a:rPr>
+              <a:t>It works by passing documents through a multi-stage pipeline, where each stage performs a specific operation on the data, such as</a:t>
+            </a:r>
+            <a:r>
+              <a:rPr lang="en-US" b="1" i="0" dirty="0">
+                <a:effectLst/>
+                <a:latin typeface="Nunito" pitchFamily="2" charset="0"/>
+              </a:rPr>
+              <a:t> filtering, grouping, sorting, reshaping and computing aggregations.</a:t>
+            </a:r>
+            <a:br>
+              <a:rPr lang="en-US" b="0" i="0" dirty="0">
+                <a:effectLst/>
+                <a:latin typeface="Nunito" pitchFamily="2" charset="0"/>
+              </a:rPr>
+            </a:br>
+            <a:endParaRPr lang="en-US" b="0" i="0" dirty="0">
+              <a:effectLst/>
+              <a:latin typeface="Nunito" pitchFamily="2" charset="0"/>
+            </a:endParaRPr>
+          </a:p>
+          <a:p>
+            <a:pPr algn="l" fontAlgn="base">
+              <a:spcAft>
+                <a:spcPts val="1800"/>
+              </a:spcAft>
+              <a:buFont typeface="Arial" panose="020B0604020202020204" pitchFamily="34" charset="0"/>
+              <a:buChar char="•"/>
+            </a:pPr>
+            <a:r>
+              <a:rPr lang="en-US" b="0" i="0" dirty="0">
+                <a:effectLst/>
+                <a:latin typeface="Nunito" pitchFamily="2" charset="0"/>
+              </a:rPr>
+              <a:t>This framework is particularly useful for creating complex data transformations and analytics directly within the </a:t>
+            </a:r>
+            <a:r>
+              <a:rPr lang="en-US" b="1" i="0" u="sng" dirty="0">
+                <a:effectLst/>
+                <a:latin typeface="Nunito" pitchFamily="2" charset="0"/>
+                <a:hlinkClick r:id="rId2">
+                  <a:extLst>
+                    <a:ext uri="{A12FA001-AC4F-418D-AE19-62706E023703}">
+                      <ahyp:hlinkClr xmlns:ahyp="http://schemas.microsoft.com/office/drawing/2018/hyperlinkcolor" val="tx"/>
+                    </a:ext>
+                  </a:extLst>
+                </a:hlinkClick>
+              </a:rPr>
+              <a:t>database</a:t>
+            </a:r>
+            <a:r>
+              <a:rPr lang="en-US" b="0" i="0" dirty="0">
+                <a:effectLst/>
+                <a:latin typeface="Nunito" pitchFamily="2" charset="0"/>
+              </a:rPr>
+              <a:t>.</a:t>
+            </a:r>
+            <a:endParaRPr lang="en-US" dirty="0">
+              <a:latin typeface="Nunito" pitchFamily="2" charset="0"/>
+            </a:endParaRPr>
+          </a:p>
+          <a:p>
+            <a:pPr algn="l" fontAlgn="base">
+              <a:spcAft>
+                <a:spcPts val="1800"/>
+              </a:spcAft>
+              <a:buFont typeface="Arial" panose="020B0604020202020204" pitchFamily="34" charset="0"/>
+              <a:buChar char="•"/>
+            </a:pPr>
+            <a:endParaRPr lang="en-US" b="0" i="0" dirty="0">
+              <a:effectLst/>
+              <a:latin typeface="Nunito" pitchFamily="2" charset="0"/>
+            </a:endParaRPr>
+          </a:p>
+        </p:txBody>
+      </p:sp>
+      <p:sp>
+        <p:nvSpPr>
+          <p:cNvPr id="7" name="Rectangle 3">
+            <a:extLst>
+              <a:ext uri="{FF2B5EF4-FFF2-40B4-BE49-F238E27FC236}">
+                <a16:creationId xmlns:a16="http://schemas.microsoft.com/office/drawing/2014/main" id="{59FF43A7-F3E4-FF53-8445-4776C532F306}"/>
+              </a:ext>
+            </a:extLst>
+          </p:cNvPr>
+          <p:cNvSpPr>
+            <a:spLocks noChangeArrowheads="1"/>
+          </p:cNvSpPr>
+          <p:nvPr/>
+        </p:nvSpPr>
+        <p:spPr bwMode="auto">
+          <a:xfrm>
+            <a:off x="272143" y="4462692"/>
+            <a:ext cx="10363200" cy="987430"/>
+          </a:xfrm>
+          <a:prstGeom prst="rect">
+            <a:avLst/>
+          </a:prstGeom>
+          <a:solidFill>
+            <a:srgbClr val="E0E0E0"/>
+          </a:solidFill>
+          <a:ln>
+            <a:noFill/>
+          </a:ln>
+          <a:effectLst/>
+          <a:extLst>
+            <a:ext uri="{91240B29-F687-4F45-9708-019B960494DF}">
+              <a14:hiddenLine xmlns:a14="http://schemas.microsoft.com/office/drawing/2010/main" w="9525">
+                <a:solidFill>
+                  <a:schemeClr val="tx1"/>
+                </a:solidFill>
+                <a:miter lim="800000"/>
+                <a:headEnd/>
+                <a:tailEnd/>
+              </a14:hiddenLine>
+            </a:ext>
+            <a:ext uri="{AF507438-7753-43E0-B8FC-AC1667EBCBE1}">
+              <a14:hiddenEffects xmlns:a14="http://schemas.microsoft.com/office/drawing/2010/main">
+                <a:effectLst>
+                  <a:outerShdw dist="35921" dir="2700000" algn="ctr" rotWithShape="0">
+                    <a:schemeClr val="bg2"/>
+                  </a:outerShdw>
+                </a:effectLst>
+              </a14:hiddenEffects>
+            </a:ext>
+          </a:extLst>
+        </p:spPr>
+        <p:txBody>
+          <a:bodyPr vert="horz" wrap="square" lIns="0" tIns="0" rIns="0" bIns="63480" numCol="1" anchor="ctr" anchorCtr="0" compatLnSpc="1">
+            <a:prstTxWarp prst="textNoShape">
+              <a:avLst/>
+            </a:prstTxWarp>
+            <a:spAutoFit/>
+          </a:bodyPr>
+          <a:lstStyle/>
+          <a:p>
+            <a:pPr marL="0" marR="0" lvl="0" indent="0" algn="l" defTabSz="914400" rtl="0" eaLnBrk="0" fontAlgn="base" latinLnBrk="0" hangingPunct="0">
+              <a:lnSpc>
+                <a:spcPct val="100000"/>
+              </a:lnSpc>
+              <a:spcBef>
+                <a:spcPct val="0"/>
+              </a:spcBef>
+              <a:spcAft>
+                <a:spcPct val="0"/>
+              </a:spcAft>
+              <a:buClrTx/>
+              <a:buSzTx/>
+              <a:buFontTx/>
+              <a:buNone/>
+              <a:tabLst/>
+            </a:pPr>
+            <a:r>
+              <a:rPr kumimoji="0" lang="en-US" altLang="en-US" sz="1200" b="0" i="0" u="none" strike="noStrike" cap="none" normalizeH="0" baseline="0" dirty="0" err="1">
+                <a:ln>
+                  <a:noFill/>
+                </a:ln>
+                <a:solidFill>
+                  <a:schemeClr val="tx1"/>
+                </a:solidFill>
+                <a:effectLst/>
+                <a:latin typeface="Consolas" panose="020B0609020204030204" pitchFamily="49" charset="0"/>
+              </a:rPr>
+              <a:t>db.sales.aggregate</a:t>
+            </a:r>
+            <a:r>
+              <a:rPr kumimoji="0" lang="en-US" altLang="en-US" sz="1200" b="0" i="0" u="none" strike="noStrike" cap="none" normalizeH="0" baseline="0" dirty="0">
+                <a:ln>
+                  <a:noFill/>
+                </a:ln>
+                <a:solidFill>
+                  <a:schemeClr val="tx1"/>
+                </a:solidFill>
+                <a:effectLst/>
+                <a:latin typeface="Consolas" panose="020B0609020204030204" pitchFamily="49" charset="0"/>
+              </a:rPr>
+              <a:t>([</a:t>
+            </a:r>
+            <a:br>
+              <a:rPr kumimoji="0" lang="en-US" altLang="en-US" sz="1200" b="0" i="0" u="none" strike="noStrike" cap="none" normalizeH="0" baseline="0" dirty="0">
+                <a:ln>
+                  <a:noFill/>
+                </a:ln>
+                <a:solidFill>
+                  <a:schemeClr val="tx1"/>
+                </a:solidFill>
+                <a:effectLst/>
+                <a:latin typeface="Consolas" panose="020B0609020204030204" pitchFamily="49" charset="0"/>
+              </a:rPr>
+            </a:br>
+            <a:r>
+              <a:rPr kumimoji="0" lang="en-US" altLang="en-US" sz="1200" b="0" i="0" u="none" strike="noStrike" cap="none" normalizeH="0" baseline="0" dirty="0">
+                <a:ln>
+                  <a:noFill/>
+                </a:ln>
+                <a:solidFill>
+                  <a:schemeClr val="tx1"/>
+                </a:solidFill>
+                <a:effectLst/>
+                <a:latin typeface="Consolas" panose="020B0609020204030204" pitchFamily="49" charset="0"/>
+              </a:rPr>
+              <a:t>{ $match: { status: "completed" } }, // Filter completed sales</a:t>
+            </a:r>
+            <a:br>
+              <a:rPr kumimoji="0" lang="en-US" altLang="en-US" sz="1200" b="0" i="0" u="none" strike="noStrike" cap="none" normalizeH="0" baseline="0" dirty="0">
+                <a:ln>
+                  <a:noFill/>
+                </a:ln>
+                <a:solidFill>
+                  <a:schemeClr val="tx1"/>
+                </a:solidFill>
+                <a:effectLst/>
+                <a:latin typeface="Consolas" panose="020B0609020204030204" pitchFamily="49" charset="0"/>
+              </a:rPr>
+            </a:br>
+            <a:r>
+              <a:rPr kumimoji="0" lang="en-US" altLang="en-US" sz="1200" b="0" i="0" u="none" strike="noStrike" cap="none" normalizeH="0" baseline="0" dirty="0">
+                <a:ln>
+                  <a:noFill/>
+                </a:ln>
+                <a:solidFill>
+                  <a:schemeClr val="tx1"/>
+                </a:solidFill>
+                <a:effectLst/>
+                <a:latin typeface="Consolas" panose="020B0609020204030204" pitchFamily="49" charset="0"/>
+              </a:rPr>
+              <a:t>{ $group: { _id: "$product", </a:t>
+            </a:r>
+            <a:r>
+              <a:rPr kumimoji="0" lang="en-US" altLang="en-US" sz="1200" b="0" i="0" u="none" strike="noStrike" cap="none" normalizeH="0" baseline="0" dirty="0" err="1">
+                <a:ln>
+                  <a:noFill/>
+                </a:ln>
+                <a:solidFill>
+                  <a:schemeClr val="tx1"/>
+                </a:solidFill>
+                <a:effectLst/>
+                <a:latin typeface="Consolas" panose="020B0609020204030204" pitchFamily="49" charset="0"/>
+              </a:rPr>
+              <a:t>totalSales</a:t>
+            </a:r>
+            <a:r>
+              <a:rPr kumimoji="0" lang="en-US" altLang="en-US" sz="1200" b="0" i="0" u="none" strike="noStrike" cap="none" normalizeH="0" baseline="0" dirty="0">
+                <a:ln>
+                  <a:noFill/>
+                </a:ln>
+                <a:solidFill>
+                  <a:schemeClr val="tx1"/>
+                </a:solidFill>
+                <a:effectLst/>
+                <a:latin typeface="Consolas" panose="020B0609020204030204" pitchFamily="49" charset="0"/>
+              </a:rPr>
+              <a:t>: { $sum: "$amount" } } }, // Group by product and sum the sales amount</a:t>
+            </a:r>
+            <a:br>
+              <a:rPr kumimoji="0" lang="en-US" altLang="en-US" sz="1200" b="0" i="0" u="none" strike="noStrike" cap="none" normalizeH="0" baseline="0" dirty="0">
+                <a:ln>
+                  <a:noFill/>
+                </a:ln>
+                <a:solidFill>
+                  <a:schemeClr val="tx1"/>
+                </a:solidFill>
+                <a:effectLst/>
+                <a:latin typeface="Consolas" panose="020B0609020204030204" pitchFamily="49" charset="0"/>
+              </a:rPr>
+            </a:br>
+            <a:r>
+              <a:rPr kumimoji="0" lang="en-US" altLang="en-US" sz="1200" b="0" i="0" u="none" strike="noStrike" cap="none" normalizeH="0" baseline="0" dirty="0">
+                <a:ln>
+                  <a:noFill/>
+                </a:ln>
+                <a:solidFill>
+                  <a:schemeClr val="tx1"/>
+                </a:solidFill>
+                <a:effectLst/>
+                <a:latin typeface="Consolas" panose="020B0609020204030204" pitchFamily="49" charset="0"/>
+              </a:rPr>
+              <a:t>{ $sort: { </a:t>
+            </a:r>
+            <a:r>
+              <a:rPr kumimoji="0" lang="en-US" altLang="en-US" sz="1200" b="0" i="0" u="none" strike="noStrike" cap="none" normalizeH="0" baseline="0" dirty="0" err="1">
+                <a:ln>
+                  <a:noFill/>
+                </a:ln>
+                <a:solidFill>
+                  <a:schemeClr val="tx1"/>
+                </a:solidFill>
+                <a:effectLst/>
+                <a:latin typeface="Consolas" panose="020B0609020204030204" pitchFamily="49" charset="0"/>
+              </a:rPr>
+              <a:t>totalSales</a:t>
+            </a:r>
+            <a:r>
+              <a:rPr kumimoji="0" lang="en-US" altLang="en-US" sz="1200" b="0" i="0" u="none" strike="noStrike" cap="none" normalizeH="0" baseline="0" dirty="0">
+                <a:ln>
+                  <a:noFill/>
+                </a:ln>
+                <a:solidFill>
+                  <a:schemeClr val="tx1"/>
+                </a:solidFill>
+                <a:effectLst/>
+                <a:latin typeface="Consolas" panose="020B0609020204030204" pitchFamily="49" charset="0"/>
+              </a:rPr>
+              <a:t>: -1 } } // Sort by total sales in descending order</a:t>
+            </a:r>
+            <a:br>
+              <a:rPr kumimoji="0" lang="en-US" altLang="en-US" sz="1200" b="0" i="0" u="none" strike="noStrike" cap="none" normalizeH="0" baseline="0" dirty="0">
+                <a:ln>
+                  <a:noFill/>
+                </a:ln>
+                <a:solidFill>
+                  <a:schemeClr val="tx1"/>
+                </a:solidFill>
+                <a:effectLst/>
+                <a:latin typeface="Consolas" panose="020B0609020204030204" pitchFamily="49" charset="0"/>
+              </a:rPr>
+            </a:br>
+            <a:r>
+              <a:rPr kumimoji="0" lang="en-US" altLang="en-US" sz="1200" b="0" i="0" u="none" strike="noStrike" cap="none" normalizeH="0" baseline="0" dirty="0">
+                <a:ln>
+                  <a:noFill/>
+                </a:ln>
+                <a:solidFill>
+                  <a:schemeClr val="tx1"/>
+                </a:solidFill>
+                <a:effectLst/>
+                <a:latin typeface="Consolas" panose="020B0609020204030204" pitchFamily="49" charset="0"/>
+              </a:rPr>
+              <a:t>])</a:t>
+            </a:r>
+            <a:r>
+              <a:rPr kumimoji="0" lang="en-US" altLang="en-US" sz="800" b="0" i="0" u="none" strike="noStrike" cap="none" normalizeH="0" baseline="0" dirty="0">
+                <a:ln>
+                  <a:noFill/>
+                </a:ln>
+                <a:solidFill>
+                  <a:schemeClr val="tx1"/>
+                </a:solidFill>
+                <a:effectLst/>
+              </a:rPr>
+              <a:t> </a:t>
+            </a:r>
+            <a:endParaRPr kumimoji="0" lang="en-US" altLang="en-US" sz="1800" b="0" i="0" u="none" strike="noStrike" cap="none" normalizeH="0" baseline="0" dirty="0">
+              <a:ln>
+                <a:noFill/>
+              </a:ln>
+              <a:solidFill>
+                <a:schemeClr val="tx1"/>
+              </a:solidFill>
+              <a:effectLst/>
+              <a:latin typeface="Arial" panose="020B0604020202020204" pitchFamily="34" charset="0"/>
+            </a:endParaRPr>
+          </a:p>
+        </p:txBody>
+      </p:sp>
+    </p:spTree>
+    <p:extLst>
+      <p:ext uri="{BB962C8B-B14F-4D97-AF65-F5344CB8AC3E}">
+        <p14:creationId xmlns:p14="http://schemas.microsoft.com/office/powerpoint/2010/main" val="93315964"/>
+      </p:ext>
+    </p:extLst>
+  </p:cSld>
+  <p:clrMapOvr>
+    <a:masterClrMapping/>
+  </p:clrMapOvr>
+</p:sld>
+</file>
+
+<file path=ppt/slides/slide14.xml><?xml version="1.0" encoding="utf-8"?>
+<p:sld xmlns:a="http://schemas.openxmlformats.org/drawingml/2006/main" xmlns:r="http://schemas.openxmlformats.org/officeDocument/2006/relationships" xmlns:p="http://schemas.openxmlformats.org/presentationml/2006/main">
+  <p:cSld>
+    <p:spTree>
+      <p:nvGrpSpPr>
+        <p:cNvPr id="1" name=""/>
+        <p:cNvGrpSpPr/>
+        <p:nvPr/>
+      </p:nvGrpSpPr>
+      <p:grpSpPr>
+        <a:xfrm>
+          <a:off x="0" y="0"/>
+          <a:ext cx="0" cy="0"/>
+          <a:chOff x="0" y="0"/>
+          <a:chExt cx="0" cy="0"/>
+        </a:xfrm>
+      </p:grpSpPr>
+      <p:sp>
+        <p:nvSpPr>
+          <p:cNvPr id="2" name="Title 1">
+            <a:extLst>
+              <a:ext uri="{FF2B5EF4-FFF2-40B4-BE49-F238E27FC236}">
+                <a16:creationId xmlns:a16="http://schemas.microsoft.com/office/drawing/2014/main" id="{94E7C1C9-0362-9EF0-7DC7-3E2BF3FB77F0}"/>
+              </a:ext>
+            </a:extLst>
+          </p:cNvPr>
+          <p:cNvSpPr>
+            <a:spLocks noGrp="1"/>
+          </p:cNvSpPr>
+          <p:nvPr>
+            <p:ph type="title"/>
+          </p:nvPr>
+        </p:nvSpPr>
+        <p:spPr>
+          <a:xfrm>
+            <a:off x="838200" y="365125"/>
+            <a:ext cx="10515600" cy="233589"/>
+          </a:xfrm>
+        </p:spPr>
+        <p:txBody>
+          <a:bodyPr>
+            <a:normAutofit fontScale="90000"/>
+          </a:bodyPr>
+          <a:lstStyle/>
+          <a:p>
+            <a:r>
+              <a:rPr lang="en-IN" dirty="0"/>
+              <a:t>Data consistency in MongoDB</a:t>
+            </a:r>
+          </a:p>
+        </p:txBody>
+      </p:sp>
+      <p:sp>
+        <p:nvSpPr>
+          <p:cNvPr id="4" name="TextBox 3">
+            <a:extLst>
+              <a:ext uri="{FF2B5EF4-FFF2-40B4-BE49-F238E27FC236}">
+                <a16:creationId xmlns:a16="http://schemas.microsoft.com/office/drawing/2014/main" id="{6CC1A03C-8510-0287-C6E2-CB75094C2624}"/>
+              </a:ext>
+            </a:extLst>
+          </p:cNvPr>
+          <p:cNvSpPr txBox="1"/>
+          <p:nvPr/>
+        </p:nvSpPr>
+        <p:spPr>
+          <a:xfrm>
+            <a:off x="1943100" y="1635242"/>
+            <a:ext cx="8305800" cy="3426579"/>
+          </a:xfrm>
+          <a:prstGeom prst="rect">
+            <a:avLst/>
+          </a:prstGeom>
+          <a:noFill/>
+        </p:spPr>
+        <p:txBody>
+          <a:bodyPr wrap="square">
+            <a:spAutoFit/>
+          </a:bodyPr>
+          <a:lstStyle/>
+          <a:p>
+            <a:pPr algn="just" rtl="0" fontAlgn="base">
+              <a:spcAft>
+                <a:spcPts val="750"/>
+              </a:spcAft>
+              <a:buNone/>
+            </a:pPr>
+            <a:r>
+              <a:rPr lang="en-US" b="0" i="0" dirty="0">
+                <a:effectLst/>
+                <a:latin typeface="Nunito" pitchFamily="2" charset="0"/>
+              </a:rPr>
+              <a:t>MongoDB provides several mechanisms to ensure data consistency:</a:t>
+            </a:r>
+          </a:p>
+          <a:p>
+            <a:pPr algn="l" fontAlgn="base">
+              <a:spcAft>
+                <a:spcPts val="1800"/>
+              </a:spcAft>
+              <a:buFont typeface="Arial" panose="020B0604020202020204" pitchFamily="34" charset="0"/>
+              <a:buChar char="•"/>
+            </a:pPr>
+            <a:r>
+              <a:rPr lang="en-US" b="1" i="0" dirty="0">
+                <a:effectLst/>
+                <a:latin typeface="Nunito" pitchFamily="2" charset="0"/>
+              </a:rPr>
+              <a:t>Journaling:</a:t>
+            </a:r>
+            <a:r>
+              <a:rPr lang="en-US" b="0" i="0" dirty="0">
+                <a:effectLst/>
+                <a:latin typeface="Nunito" pitchFamily="2" charset="0"/>
+              </a:rPr>
+              <a:t> MongoDB uses write-ahead logging to maintain data integrity.</a:t>
+            </a:r>
+            <a:br>
+              <a:rPr lang="en-US" b="0" i="0" dirty="0">
+                <a:effectLst/>
+                <a:latin typeface="Nunito" pitchFamily="2" charset="0"/>
+              </a:rPr>
+            </a:br>
+            <a:endParaRPr lang="en-US" b="0" i="0" dirty="0">
+              <a:effectLst/>
+              <a:latin typeface="Nunito" pitchFamily="2" charset="0"/>
+            </a:endParaRPr>
+          </a:p>
+          <a:p>
+            <a:pPr algn="l" fontAlgn="base">
+              <a:spcAft>
+                <a:spcPts val="1800"/>
+              </a:spcAft>
+              <a:buFont typeface="Arial" panose="020B0604020202020204" pitchFamily="34" charset="0"/>
+              <a:buChar char="•"/>
+            </a:pPr>
+            <a:r>
+              <a:rPr lang="en-US" b="1" i="0" dirty="0">
+                <a:effectLst/>
+                <a:latin typeface="Nunito" pitchFamily="2" charset="0"/>
+              </a:rPr>
+              <a:t>Write Concerns:</a:t>
+            </a:r>
+            <a:r>
+              <a:rPr lang="en-US" b="0" i="0" dirty="0">
+                <a:effectLst/>
+                <a:latin typeface="Nunito" pitchFamily="2" charset="0"/>
+              </a:rPr>
+              <a:t> It specify the level of acknowledgment requested from MongoDB for write operations (e.g., acknowledgment from primary only, or acknowledgment from primary and secondaries).</a:t>
+            </a:r>
+            <a:br>
+              <a:rPr lang="en-US" b="0" i="0" dirty="0">
+                <a:effectLst/>
+                <a:latin typeface="Nunito" pitchFamily="2" charset="0"/>
+              </a:rPr>
+            </a:br>
+            <a:endParaRPr lang="en-US" b="0" i="0" dirty="0">
+              <a:effectLst/>
+              <a:latin typeface="Nunito" pitchFamily="2" charset="0"/>
+            </a:endParaRPr>
+          </a:p>
+          <a:p>
+            <a:pPr algn="l" fontAlgn="base">
+              <a:spcAft>
+                <a:spcPts val="1800"/>
+              </a:spcAft>
+              <a:buFont typeface="Arial" panose="020B0604020202020204" pitchFamily="34" charset="0"/>
+              <a:buChar char="•"/>
+            </a:pPr>
+            <a:r>
+              <a:rPr lang="en-US" b="1" i="0" dirty="0">
+                <a:effectLst/>
+                <a:latin typeface="Nunito" pitchFamily="2" charset="0"/>
+              </a:rPr>
+              <a:t>Replica Sets:</a:t>
+            </a:r>
+            <a:r>
+              <a:rPr lang="en-US" b="0" i="0" dirty="0">
+                <a:effectLst/>
+                <a:latin typeface="Nunito" pitchFamily="2" charset="0"/>
+              </a:rPr>
+              <a:t> Replication ensures data is consistent across multiple nodes, and read concerns can be configured to ensure data consistency for read operations.</a:t>
+            </a:r>
+          </a:p>
+        </p:txBody>
+      </p:sp>
+    </p:spTree>
+    <p:extLst>
+      <p:ext uri="{BB962C8B-B14F-4D97-AF65-F5344CB8AC3E}">
+        <p14:creationId xmlns:p14="http://schemas.microsoft.com/office/powerpoint/2010/main" val="4207746164"/>
+      </p:ext>
+    </p:extLst>
+  </p:cSld>
+  <p:clrMapOvr>
+    <a:masterClrMapping/>
+  </p:clrMapOvr>
+</p:sld>
+</file>
+
+<file path=ppt/slides/slide15.xml><?xml version="1.0" encoding="utf-8"?>
+<p:sld xmlns:a="http://schemas.openxmlformats.org/drawingml/2006/main" xmlns:r="http://schemas.openxmlformats.org/officeDocument/2006/relationships" xmlns:p="http://schemas.openxmlformats.org/presentationml/2006/main">
+  <p:cSld>
+    <p:spTree>
+      <p:nvGrpSpPr>
+        <p:cNvPr id="1" name=""/>
+        <p:cNvGrpSpPr/>
+        <p:nvPr/>
+      </p:nvGrpSpPr>
+      <p:grpSpPr>
+        <a:xfrm>
+          <a:off x="0" y="0"/>
+          <a:ext cx="0" cy="0"/>
+          <a:chOff x="0" y="0"/>
+          <a:chExt cx="0" cy="0"/>
+        </a:xfrm>
+      </p:grpSpPr>
+      <p:sp>
+        <p:nvSpPr>
+          <p:cNvPr id="2" name="Title 1">
+            <a:extLst>
+              <a:ext uri="{FF2B5EF4-FFF2-40B4-BE49-F238E27FC236}">
                 <a16:creationId xmlns:a16="http://schemas.microsoft.com/office/drawing/2014/main" id="{2A00419A-AD4D-F15F-61DA-1BE2C850CD32}"/>
               </a:ext>
             </a:extLst>
@@ -7697,7 +8382,7 @@
 </p:sld>
 </file>
 
-<file path=ppt/slides/slide14.xml><?xml version="1.0" encoding="utf-8"?>
+<file path=ppt/slides/slide16.xml><?xml version="1.0" encoding="utf-8"?>
 <p:sld xmlns:a="http://schemas.openxmlformats.org/drawingml/2006/main" xmlns:r="http://schemas.openxmlformats.org/officeDocument/2006/relationships" xmlns:p="http://schemas.openxmlformats.org/presentationml/2006/main">
   <p:cSld>
     <p:spTree>
@@ -8020,7 +8705,7 @@
 </p:sld>
 </file>
 
-<file path=ppt/slides/slide15.xml><?xml version="1.0" encoding="utf-8"?>
+<file path=ppt/slides/slide17.xml><?xml version="1.0" encoding="utf-8"?>
 <p:sld xmlns:a="http://schemas.openxmlformats.org/drawingml/2006/main" xmlns:r="http://schemas.openxmlformats.org/officeDocument/2006/relationships" xmlns:p="http://schemas.openxmlformats.org/presentationml/2006/main">
   <p:cSld>
     <p:spTree>
@@ -8144,7 +8829,7 @@
 </p:sld>
 </file>
 
-<file path=ppt/slides/slide16.xml><?xml version="1.0" encoding="utf-8"?>
+<file path=ppt/slides/slide18.xml><?xml version="1.0" encoding="utf-8"?>
 <p:sld xmlns:a="http://schemas.openxmlformats.org/drawingml/2006/main" xmlns:r="http://schemas.openxmlformats.org/officeDocument/2006/relationships" xmlns:p="http://schemas.openxmlformats.org/presentationml/2006/main">
   <p:cSld>
     <p:spTree>
